--- a/topic01-objects-and-classes/unit-1/talk-1-bluej/getting-started-bluej.pptx
+++ b/topic01-objects-and-classes/unit-1/talk-1-bluej/getting-started-bluej.pptx
@@ -5,7 +5,7 @@
     <p:sldMasterId id="2147483660" r:id="rId1"/>
   </p:sldMasterIdLst>
   <p:notesMasterIdLst>
-    <p:notesMasterId r:id="rId18"/>
+    <p:notesMasterId r:id="rId20"/>
   </p:notesMasterIdLst>
   <p:sldIdLst>
     <p:sldId id="325" r:id="rId2"/>
@@ -17,13 +17,15 @@
     <p:sldId id="286" r:id="rId8"/>
     <p:sldId id="667" r:id="rId9"/>
     <p:sldId id="680" r:id="rId10"/>
-    <p:sldId id="670" r:id="rId11"/>
-    <p:sldId id="678" r:id="rId12"/>
-    <p:sldId id="690" r:id="rId13"/>
-    <p:sldId id="673" r:id="rId14"/>
-    <p:sldId id="691" r:id="rId15"/>
-    <p:sldId id="679" r:id="rId16"/>
-    <p:sldId id="347" r:id="rId17"/>
+    <p:sldId id="693" r:id="rId11"/>
+    <p:sldId id="692" r:id="rId12"/>
+    <p:sldId id="670" r:id="rId13"/>
+    <p:sldId id="678" r:id="rId14"/>
+    <p:sldId id="690" r:id="rId15"/>
+    <p:sldId id="673" r:id="rId16"/>
+    <p:sldId id="691" r:id="rId17"/>
+    <p:sldId id="679" r:id="rId18"/>
+    <p:sldId id="347" r:id="rId19"/>
   </p:sldIdLst>
   <p:sldSz cx="12192000" cy="6858000"/>
   <p:notesSz cx="6858000" cy="9144000"/>
@@ -4749,7 +4751,13 @@
   <p:cSld>
     <p:spTree>
       <p:nvGrpSpPr>
-        <p:cNvPr id="1" name=""/>
+        <p:cNvPr id="1" name="">
+          <a:extLst>
+            <a:ext uri="{FF2B5EF4-FFF2-40B4-BE49-F238E27FC236}">
+              <a16:creationId xmlns:a16="http://schemas.microsoft.com/office/drawing/2014/main" id="{E98A1368-C4F3-3755-BFA2-4897EA048EBA}"/>
+            </a:ext>
+          </a:extLst>
+        </p:cNvPr>
         <p:cNvGrpSpPr/>
         <p:nvPr/>
       </p:nvGrpSpPr>
@@ -4766,7 +4774,7 @@
           <p:cNvPr id="2" name="Title 1">
             <a:extLst>
               <a:ext uri="{FF2B5EF4-FFF2-40B4-BE49-F238E27FC236}">
-                <a16:creationId xmlns:a16="http://schemas.microsoft.com/office/drawing/2014/main" id="{E6087A9B-75BD-2B7B-ED53-385535B5B8EB}"/>
+                <a16:creationId xmlns:a16="http://schemas.microsoft.com/office/drawing/2014/main" id="{0FD9B550-1A00-C14E-0084-D0A9A74ED017}"/>
               </a:ext>
             </a:extLst>
           </p:cNvPr>
@@ -4794,7 +4802,7 @@
           <p:cNvPr id="6" name="Content Placeholder 5">
             <a:extLst>
               <a:ext uri="{FF2B5EF4-FFF2-40B4-BE49-F238E27FC236}">
-                <a16:creationId xmlns:a16="http://schemas.microsoft.com/office/drawing/2014/main" id="{F245F4E7-767C-A09E-16B7-7ABF4139C6B6}"/>
+                <a16:creationId xmlns:a16="http://schemas.microsoft.com/office/drawing/2014/main" id="{2DAC2DC8-CE43-6376-0541-6EEABE3B40D6}"/>
               </a:ext>
             </a:extLst>
           </p:cNvPr>
@@ -4821,18 +4829,6 @@
             </a:r>
           </a:p>
           <a:p>
-            <a:r>
-              <a:rPr lang="en-IE" dirty="0"/>
-              <a:t>Give your project a name and location, press OK</a:t>
-            </a:r>
-          </a:p>
-          <a:p>
-            <a:r>
-              <a:rPr lang="en-IE" dirty="0"/>
-              <a:t>Click on New Class, and name it</a:t>
-            </a:r>
-          </a:p>
-          <a:p>
             <a:endParaRPr lang="en-IE" dirty="0"/>
           </a:p>
           <a:p>
@@ -4845,7 +4841,7 @@
           <p:cNvPr id="9" name="Picture 8">
             <a:extLst>
               <a:ext uri="{FF2B5EF4-FFF2-40B4-BE49-F238E27FC236}">
-                <a16:creationId xmlns:a16="http://schemas.microsoft.com/office/drawing/2014/main" id="{49B2F710-7D84-3F69-1758-EA65A4715211}"/>
+                <a16:creationId xmlns:a16="http://schemas.microsoft.com/office/drawing/2014/main" id="{CFA4C8DB-8BF1-9EE6-4D50-15C7350E487D}"/>
               </a:ext>
             </a:extLst>
           </p:cNvPr>
@@ -4870,100 +4866,10 @@
           </a:prstGeom>
         </p:spPr>
       </p:pic>
-      <p:pic>
-        <p:nvPicPr>
-          <p:cNvPr id="11" name="Picture 10">
-            <a:extLst>
-              <a:ext uri="{FF2B5EF4-FFF2-40B4-BE49-F238E27FC236}">
-                <a16:creationId xmlns:a16="http://schemas.microsoft.com/office/drawing/2014/main" id="{C2E76B53-B3BF-9360-E555-CFC2FAD26B79}"/>
-              </a:ext>
-            </a:extLst>
-          </p:cNvPr>
-          <p:cNvPicPr>
-            <a:picLocks noChangeAspect="1"/>
-          </p:cNvPicPr>
-          <p:nvPr/>
-        </p:nvPicPr>
-        <p:blipFill>
-          <a:blip r:embed="rId3"/>
-          <a:stretch>
-            <a:fillRect/>
-          </a:stretch>
-        </p:blipFill>
-        <p:spPr>
-          <a:xfrm>
-            <a:off x="5943600" y="1711008"/>
-            <a:ext cx="4277322" cy="1943371"/>
-          </a:xfrm>
-          <a:prstGeom prst="rect">
-            <a:avLst/>
-          </a:prstGeom>
-        </p:spPr>
-      </p:pic>
-      <p:pic>
-        <p:nvPicPr>
-          <p:cNvPr id="15" name="Picture 14">
-            <a:extLst>
-              <a:ext uri="{FF2B5EF4-FFF2-40B4-BE49-F238E27FC236}">
-                <a16:creationId xmlns:a16="http://schemas.microsoft.com/office/drawing/2014/main" id="{9C8697CD-C7FD-0740-BAE5-5A901F8131AD}"/>
-              </a:ext>
-            </a:extLst>
-          </p:cNvPr>
-          <p:cNvPicPr>
-            <a:picLocks noChangeAspect="1"/>
-          </p:cNvPicPr>
-          <p:nvPr/>
-        </p:nvPicPr>
-        <p:blipFill>
-          <a:blip r:embed="rId4"/>
-          <a:stretch>
-            <a:fillRect/>
-          </a:stretch>
-        </p:blipFill>
-        <p:spPr>
-          <a:xfrm>
-            <a:off x="7086600" y="1219200"/>
-            <a:ext cx="2476846" cy="4134427"/>
-          </a:xfrm>
-          <a:prstGeom prst="rect">
-            <a:avLst/>
-          </a:prstGeom>
-        </p:spPr>
-      </p:pic>
-      <p:pic>
-        <p:nvPicPr>
-          <p:cNvPr id="17" name="Picture 16">
-            <a:extLst>
-              <a:ext uri="{FF2B5EF4-FFF2-40B4-BE49-F238E27FC236}">
-                <a16:creationId xmlns:a16="http://schemas.microsoft.com/office/drawing/2014/main" id="{23025BBB-B915-17E8-078C-5054ADA8FF1F}"/>
-              </a:ext>
-            </a:extLst>
-          </p:cNvPr>
-          <p:cNvPicPr>
-            <a:picLocks noChangeAspect="1"/>
-          </p:cNvPicPr>
-          <p:nvPr/>
-        </p:nvPicPr>
-        <p:blipFill>
-          <a:blip r:embed="rId5"/>
-          <a:stretch>
-            <a:fillRect/>
-          </a:stretch>
-        </p:blipFill>
-        <p:spPr>
-          <a:xfrm>
-            <a:off x="4937760" y="881867"/>
-            <a:ext cx="7411484" cy="5611008"/>
-          </a:xfrm>
-          <a:prstGeom prst="rect">
-            <a:avLst/>
-          </a:prstGeom>
-        </p:spPr>
-      </p:pic>
     </p:spTree>
     <p:extLst>
       <p:ext uri="{BB962C8B-B14F-4D97-AF65-F5344CB8AC3E}">
-        <p14:creationId xmlns:p14="http://schemas.microsoft.com/office/powerpoint/2010/main" val="3661995497"/>
+        <p14:creationId xmlns:p14="http://schemas.microsoft.com/office/powerpoint/2010/main" val="705394113"/>
       </p:ext>
     </p:extLst>
   </p:cSld>
@@ -5048,6 +4954,277 @@
                                   </p:childTnLst>
                                 </p:cTn>
                               </p:par>
+                              <p:par>
+                                <p:cTn id="9" presetID="1" presetClass="exit" presetSubtype="0" fill="hold" nodeType="withEffect">
+                                  <p:stCondLst>
+                                    <p:cond delay="0"/>
+                                  </p:stCondLst>
+                                  <p:childTnLst>
+                                    <p:set>
+                                      <p:cBhvr>
+                                        <p:cTn id="10" dur="1" fill="hold">
+                                          <p:stCondLst>
+                                            <p:cond delay="0"/>
+                                          </p:stCondLst>
+                                        </p:cTn>
+                                        <p:tgtEl>
+                                          <p:spTgt spid="9"/>
+                                        </p:tgtEl>
+                                        <p:attrNameLst>
+                                          <p:attrName>style.visibility</p:attrName>
+                                        </p:attrNameLst>
+                                      </p:cBhvr>
+                                      <p:to>
+                                        <p:strVal val="hidden"/>
+                                      </p:to>
+                                    </p:set>
+                                  </p:childTnLst>
+                                </p:cTn>
+                              </p:par>
+                            </p:childTnLst>
+                          </p:cTn>
+                        </p:par>
+                      </p:childTnLst>
+                    </p:cTn>
+                  </p:par>
+                </p:childTnLst>
+              </p:cTn>
+              <p:prevCondLst>
+                <p:cond evt="onPrev" delay="0">
+                  <p:tgtEl>
+                    <p:sldTgt/>
+                  </p:tgtEl>
+                </p:cond>
+              </p:prevCondLst>
+              <p:nextCondLst>
+                <p:cond evt="onNext" delay="0">
+                  <p:tgtEl>
+                    <p:sldTgt/>
+                  </p:tgtEl>
+                </p:cond>
+              </p:nextCondLst>
+            </p:seq>
+          </p:childTnLst>
+        </p:cTn>
+      </p:par>
+    </p:tnLst>
+    <p:bldLst>
+      <p:bldP spid="6" grpId="0" uiExpand="1" build="p"/>
+    </p:bldLst>
+  </p:timing>
+</p:sld>
+</file>
+
+<file path=ppt/slides/slide11.xml><?xml version="1.0" encoding="utf-8"?>
+<p:sld xmlns:a="http://schemas.openxmlformats.org/drawingml/2006/main" xmlns:r="http://schemas.openxmlformats.org/officeDocument/2006/relationships" xmlns:p="http://schemas.openxmlformats.org/presentationml/2006/main">
+  <p:cSld>
+    <p:spTree>
+      <p:nvGrpSpPr>
+        <p:cNvPr id="1" name="">
+          <a:extLst>
+            <a:ext uri="{FF2B5EF4-FFF2-40B4-BE49-F238E27FC236}">
+              <a16:creationId xmlns:a16="http://schemas.microsoft.com/office/drawing/2014/main" id="{D9909A26-C23E-05D0-B687-F14D425475D6}"/>
+            </a:ext>
+          </a:extLst>
+        </p:cNvPr>
+        <p:cNvGrpSpPr/>
+        <p:nvPr/>
+      </p:nvGrpSpPr>
+      <p:grpSpPr>
+        <a:xfrm>
+          <a:off x="0" y="0"/>
+          <a:ext cx="0" cy="0"/>
+          <a:chOff x="0" y="0"/>
+          <a:chExt cx="0" cy="0"/>
+        </a:xfrm>
+      </p:grpSpPr>
+      <p:sp>
+        <p:nvSpPr>
+          <p:cNvPr id="2" name="Title 1">
+            <a:extLst>
+              <a:ext uri="{FF2B5EF4-FFF2-40B4-BE49-F238E27FC236}">
+                <a16:creationId xmlns:a16="http://schemas.microsoft.com/office/drawing/2014/main" id="{D5DC0DA8-BCD3-EF59-968A-E7BC523F8FC1}"/>
+              </a:ext>
+            </a:extLst>
+          </p:cNvPr>
+          <p:cNvSpPr>
+            <a:spLocks noGrp="1"/>
+          </p:cNvSpPr>
+          <p:nvPr>
+            <p:ph type="title"/>
+          </p:nvPr>
+        </p:nvSpPr>
+        <p:spPr/>
+        <p:txBody>
+          <a:bodyPr/>
+          <a:lstStyle/>
+          <a:p>
+            <a:r>
+              <a:rPr lang="en-US" dirty="0"/>
+              <a:t>New Java Project</a:t>
+            </a:r>
+          </a:p>
+        </p:txBody>
+      </p:sp>
+      <p:sp>
+        <p:nvSpPr>
+          <p:cNvPr id="6" name="Content Placeholder 5">
+            <a:extLst>
+              <a:ext uri="{FF2B5EF4-FFF2-40B4-BE49-F238E27FC236}">
+                <a16:creationId xmlns:a16="http://schemas.microsoft.com/office/drawing/2014/main" id="{31601A54-2A75-E90D-0C18-2653F5E4BB0F}"/>
+              </a:ext>
+            </a:extLst>
+          </p:cNvPr>
+          <p:cNvSpPr>
+            <a:spLocks noGrp="1"/>
+          </p:cNvSpPr>
+          <p:nvPr>
+            <p:ph idx="1"/>
+          </p:nvPr>
+        </p:nvSpPr>
+        <p:spPr>
+          <a:xfrm>
+            <a:off x="838200" y="1825625"/>
+            <a:ext cx="3886200" cy="4351338"/>
+          </a:xfrm>
+        </p:spPr>
+        <p:txBody>
+          <a:bodyPr/>
+          <a:lstStyle/>
+          <a:p>
+            <a:r>
+              <a:rPr lang="en-IE" dirty="0"/>
+              <a:t>Give your project a name and location, press OK</a:t>
+            </a:r>
+          </a:p>
+          <a:p>
+            <a:endParaRPr lang="en-IE" dirty="0"/>
+          </a:p>
+          <a:p>
+            <a:endParaRPr lang="en-IE" dirty="0"/>
+          </a:p>
+        </p:txBody>
+      </p:sp>
+      <p:pic>
+        <p:nvPicPr>
+          <p:cNvPr id="9" name="Picture 8">
+            <a:extLst>
+              <a:ext uri="{FF2B5EF4-FFF2-40B4-BE49-F238E27FC236}">
+                <a16:creationId xmlns:a16="http://schemas.microsoft.com/office/drawing/2014/main" id="{A923AFCF-F5F5-156A-B508-D046A5F98AD0}"/>
+              </a:ext>
+            </a:extLst>
+          </p:cNvPr>
+          <p:cNvPicPr>
+            <a:picLocks noChangeAspect="1"/>
+          </p:cNvPicPr>
+          <p:nvPr/>
+        </p:nvPicPr>
+        <p:blipFill>
+          <a:blip r:embed="rId2"/>
+          <a:stretch>
+            <a:fillRect/>
+          </a:stretch>
+        </p:blipFill>
+        <p:spPr>
+          <a:xfrm>
+            <a:off x="4953000" y="762000"/>
+            <a:ext cx="7440063" cy="5582429"/>
+          </a:xfrm>
+          <a:prstGeom prst="rect">
+            <a:avLst/>
+          </a:prstGeom>
+        </p:spPr>
+      </p:pic>
+      <p:pic>
+        <p:nvPicPr>
+          <p:cNvPr id="11" name="Picture 10">
+            <a:extLst>
+              <a:ext uri="{FF2B5EF4-FFF2-40B4-BE49-F238E27FC236}">
+                <a16:creationId xmlns:a16="http://schemas.microsoft.com/office/drawing/2014/main" id="{E42314FF-C562-5006-0D58-43EEB0234BB5}"/>
+              </a:ext>
+            </a:extLst>
+          </p:cNvPr>
+          <p:cNvPicPr>
+            <a:picLocks noChangeAspect="1"/>
+          </p:cNvPicPr>
+          <p:nvPr/>
+        </p:nvPicPr>
+        <p:blipFill>
+          <a:blip r:embed="rId3"/>
+          <a:stretch>
+            <a:fillRect/>
+          </a:stretch>
+        </p:blipFill>
+        <p:spPr>
+          <a:xfrm>
+            <a:off x="6534370" y="2362200"/>
+            <a:ext cx="4277322" cy="1943371"/>
+          </a:xfrm>
+          <a:prstGeom prst="rect">
+            <a:avLst/>
+          </a:prstGeom>
+        </p:spPr>
+      </p:pic>
+    </p:spTree>
+    <p:extLst>
+      <p:ext uri="{BB962C8B-B14F-4D97-AF65-F5344CB8AC3E}">
+        <p14:creationId xmlns:p14="http://schemas.microsoft.com/office/powerpoint/2010/main" val="3797553846"/>
+      </p:ext>
+    </p:extLst>
+  </p:cSld>
+  <p:clrMapOvr>
+    <a:masterClrMapping/>
+  </p:clrMapOvr>
+  <p:timing>
+    <p:tnLst>
+      <p:par>
+        <p:cTn id="1" dur="indefinite" restart="never" nodeType="tmRoot">
+          <p:childTnLst>
+            <p:seq concurrent="1" nextAc="seek">
+              <p:cTn id="2" dur="indefinite" nodeType="mainSeq">
+                <p:childTnLst>
+                  <p:par>
+                    <p:cTn id="3" fill="hold">
+                      <p:stCondLst>
+                        <p:cond delay="indefinite"/>
+                        <p:cond evt="onBegin" delay="0">
+                          <p:tn val="2"/>
+                        </p:cond>
+                      </p:stCondLst>
+                      <p:childTnLst>
+                        <p:par>
+                          <p:cTn id="4" fill="hold">
+                            <p:stCondLst>
+                              <p:cond delay="0"/>
+                            </p:stCondLst>
+                            <p:childTnLst>
+                              <p:par>
+                                <p:cTn id="5" presetID="1" presetClass="entr" presetSubtype="0" fill="hold" nodeType="withEffect">
+                                  <p:stCondLst>
+                                    <p:cond delay="0"/>
+                                  </p:stCondLst>
+                                  <p:childTnLst>
+                                    <p:set>
+                                      <p:cBhvr>
+                                        <p:cTn id="6" dur="1" fill="hold">
+                                          <p:stCondLst>
+                                            <p:cond delay="0"/>
+                                          </p:stCondLst>
+                                        </p:cTn>
+                                        <p:tgtEl>
+                                          <p:spTgt spid="9"/>
+                                        </p:tgtEl>
+                                        <p:attrNameLst>
+                                          <p:attrName>style.visibility</p:attrName>
+                                        </p:attrNameLst>
+                                      </p:cBhvr>
+                                      <p:to>
+                                        <p:strVal val="visible"/>
+                                      </p:to>
+                                    </p:set>
+                                  </p:childTnLst>
+                                </p:cTn>
+                              </p:par>
                             </p:childTnLst>
                           </p:cTn>
                         </p:par>
@@ -5055,26 +5232,26 @@
                     </p:cTn>
                   </p:par>
                   <p:par>
-                    <p:cTn id="9" fill="hold">
+                    <p:cTn id="7" fill="hold">
                       <p:stCondLst>
                         <p:cond delay="indefinite"/>
                       </p:stCondLst>
                       <p:childTnLst>
                         <p:par>
-                          <p:cTn id="10" fill="hold">
+                          <p:cTn id="8" fill="hold">
                             <p:stCondLst>
                               <p:cond delay="0"/>
                             </p:stCondLst>
                             <p:childTnLst>
                               <p:par>
-                                <p:cTn id="11" presetID="1" presetClass="entr" presetSubtype="0" fill="hold" grpId="0" nodeType="clickEffect">
+                                <p:cTn id="9" presetID="1" presetClass="entr" presetSubtype="0" fill="hold" grpId="0" nodeType="clickEffect">
                                   <p:stCondLst>
                                     <p:cond delay="0"/>
                                   </p:stCondLst>
                                   <p:childTnLst>
                                     <p:set>
                                       <p:cBhvr>
-                                        <p:cTn id="12" dur="1" fill="hold">
+                                        <p:cTn id="10" dur="1" fill="hold">
                                           <p:stCondLst>
                                             <p:cond delay="0"/>
                                           </p:stCondLst>
@@ -5082,7 +5259,7 @@
                                         <p:tgtEl>
                                           <p:spTgt spid="6">
                                             <p:txEl>
-                                              <p:pRg st="1" end="1"/>
+                                              <p:pRg st="0" end="0"/>
                                             </p:txEl>
                                           </p:spTgt>
                                         </p:tgtEl>
@@ -5098,14 +5275,14 @@
                                 </p:cTn>
                               </p:par>
                               <p:par>
-                                <p:cTn id="13" presetID="1" presetClass="exit" presetSubtype="0" fill="hold" nodeType="withEffect">
+                                <p:cTn id="11" presetID="1" presetClass="exit" presetSubtype="0" fill="hold" nodeType="withEffect">
                                   <p:stCondLst>
                                     <p:cond delay="0"/>
                                   </p:stCondLst>
                                   <p:childTnLst>
                                     <p:set>
                                       <p:cBhvr>
-                                        <p:cTn id="14" dur="1" fill="hold">
+                                        <p:cTn id="12" dur="1" fill="hold">
                                           <p:stCondLst>
                                             <p:cond delay="0"/>
                                           </p:stCondLst>
@@ -5125,14 +5302,14 @@
                                 </p:cTn>
                               </p:par>
                               <p:par>
-                                <p:cTn id="15" presetID="1" presetClass="entr" presetSubtype="0" fill="hold" nodeType="withEffect">
+                                <p:cTn id="13" presetID="1" presetClass="entr" presetSubtype="0" fill="hold" nodeType="withEffect">
                                   <p:stCondLst>
                                     <p:cond delay="0"/>
                                   </p:stCondLst>
                                   <p:childTnLst>
                                     <p:set>
                                       <p:cBhvr>
-                                        <p:cTn id="16" dur="1" fill="hold">
+                                        <p:cTn id="14" dur="1" fill="hold">
                                           <p:stCondLst>
                                             <p:cond delay="0"/>
                                           </p:stCondLst>
@@ -5151,64 +5328,15 @@
                                   </p:childTnLst>
                                 </p:cTn>
                               </p:par>
-                            </p:childTnLst>
-                          </p:cTn>
-                        </p:par>
-                      </p:childTnLst>
-                    </p:cTn>
-                  </p:par>
-                  <p:par>
-                    <p:cTn id="17" fill="hold">
-                      <p:stCondLst>
-                        <p:cond delay="indefinite"/>
-                      </p:stCondLst>
-                      <p:childTnLst>
-                        <p:par>
-                          <p:cTn id="18" fill="hold">
-                            <p:stCondLst>
-                              <p:cond delay="0"/>
-                            </p:stCondLst>
-                            <p:childTnLst>
                               <p:par>
-                                <p:cTn id="19" presetID="1" presetClass="entr" presetSubtype="0" fill="hold" grpId="0" nodeType="clickEffect">
+                                <p:cTn id="15" presetID="1" presetClass="exit" presetSubtype="0" fill="hold" nodeType="withEffect">
                                   <p:stCondLst>
                                     <p:cond delay="0"/>
                                   </p:stCondLst>
                                   <p:childTnLst>
                                     <p:set>
                                       <p:cBhvr>
-                                        <p:cTn id="20" dur="1" fill="hold">
-                                          <p:stCondLst>
-                                            <p:cond delay="0"/>
-                                          </p:stCondLst>
-                                        </p:cTn>
-                                        <p:tgtEl>
-                                          <p:spTgt spid="6">
-                                            <p:txEl>
-                                              <p:pRg st="2" end="2"/>
-                                            </p:txEl>
-                                          </p:spTgt>
-                                        </p:tgtEl>
-                                        <p:attrNameLst>
-                                          <p:attrName>style.visibility</p:attrName>
-                                        </p:attrNameLst>
-                                      </p:cBhvr>
-                                      <p:to>
-                                        <p:strVal val="visible"/>
-                                      </p:to>
-                                    </p:set>
-                                  </p:childTnLst>
-                                </p:cTn>
-                              </p:par>
-                              <p:par>
-                                <p:cTn id="21" presetID="1" presetClass="exit" presetSubtype="0" fill="hold" nodeType="withEffect">
-                                  <p:stCondLst>
-                                    <p:cond delay="0"/>
-                                  </p:stCondLst>
-                                  <p:childTnLst>
-                                    <p:set>
-                                      <p:cBhvr>
-                                        <p:cTn id="22" dur="1" fill="hold">
+                                        <p:cTn id="16" dur="1" fill="hold">
                                           <p:stCondLst>
                                             <p:cond delay="0"/>
                                           </p:stCondLst>
@@ -5230,21 +5358,260 @@
                             </p:childTnLst>
                           </p:cTn>
                         </p:par>
+                      </p:childTnLst>
+                    </p:cTn>
+                  </p:par>
+                </p:childTnLst>
+              </p:cTn>
+              <p:prevCondLst>
+                <p:cond evt="onPrev" delay="0">
+                  <p:tgtEl>
+                    <p:sldTgt/>
+                  </p:tgtEl>
+                </p:cond>
+              </p:prevCondLst>
+              <p:nextCondLst>
+                <p:cond evt="onNext" delay="0">
+                  <p:tgtEl>
+                    <p:sldTgt/>
+                  </p:tgtEl>
+                </p:cond>
+              </p:nextCondLst>
+            </p:seq>
+          </p:childTnLst>
+        </p:cTn>
+      </p:par>
+    </p:tnLst>
+    <p:bldLst>
+      <p:bldP spid="6" grpId="0" uiExpand="1" build="p"/>
+    </p:bldLst>
+  </p:timing>
+</p:sld>
+</file>
+
+<file path=ppt/slides/slide12.xml><?xml version="1.0" encoding="utf-8"?>
+<p:sld xmlns:a="http://schemas.openxmlformats.org/drawingml/2006/main" xmlns:r="http://schemas.openxmlformats.org/officeDocument/2006/relationships" xmlns:p="http://schemas.openxmlformats.org/presentationml/2006/main">
+  <p:cSld>
+    <p:spTree>
+      <p:nvGrpSpPr>
+        <p:cNvPr id="1" name=""/>
+        <p:cNvGrpSpPr/>
+        <p:nvPr/>
+      </p:nvGrpSpPr>
+      <p:grpSpPr>
+        <a:xfrm>
+          <a:off x="0" y="0"/>
+          <a:ext cx="0" cy="0"/>
+          <a:chOff x="0" y="0"/>
+          <a:chExt cx="0" cy="0"/>
+        </a:xfrm>
+      </p:grpSpPr>
+      <p:sp>
+        <p:nvSpPr>
+          <p:cNvPr id="2" name="Title 1">
+            <a:extLst>
+              <a:ext uri="{FF2B5EF4-FFF2-40B4-BE49-F238E27FC236}">
+                <a16:creationId xmlns:a16="http://schemas.microsoft.com/office/drawing/2014/main" id="{E6087A9B-75BD-2B7B-ED53-385535B5B8EB}"/>
+              </a:ext>
+            </a:extLst>
+          </p:cNvPr>
+          <p:cNvSpPr>
+            <a:spLocks noGrp="1"/>
+          </p:cNvSpPr>
+          <p:nvPr>
+            <p:ph type="title"/>
+          </p:nvPr>
+        </p:nvSpPr>
+        <p:spPr/>
+        <p:txBody>
+          <a:bodyPr/>
+          <a:lstStyle/>
+          <a:p>
+            <a:r>
+              <a:rPr lang="en-US" dirty="0"/>
+              <a:t>New Java Project</a:t>
+            </a:r>
+          </a:p>
+        </p:txBody>
+      </p:sp>
+      <p:sp>
+        <p:nvSpPr>
+          <p:cNvPr id="6" name="Content Placeholder 5">
+            <a:extLst>
+              <a:ext uri="{FF2B5EF4-FFF2-40B4-BE49-F238E27FC236}">
+                <a16:creationId xmlns:a16="http://schemas.microsoft.com/office/drawing/2014/main" id="{F245F4E7-767C-A09E-16B7-7ABF4139C6B6}"/>
+              </a:ext>
+            </a:extLst>
+          </p:cNvPr>
+          <p:cNvSpPr>
+            <a:spLocks noGrp="1"/>
+          </p:cNvSpPr>
+          <p:nvPr>
+            <p:ph idx="1"/>
+          </p:nvPr>
+        </p:nvSpPr>
+        <p:spPr>
+          <a:xfrm>
+            <a:off x="838200" y="1825625"/>
+            <a:ext cx="3886200" cy="4351338"/>
+          </a:xfrm>
+        </p:spPr>
+        <p:txBody>
+          <a:bodyPr/>
+          <a:lstStyle/>
+          <a:p>
+            <a:r>
+              <a:rPr lang="en-IE" dirty="0"/>
+              <a:t>Click on New Class, and name it</a:t>
+            </a:r>
+          </a:p>
+          <a:p>
+            <a:endParaRPr lang="en-IE" dirty="0"/>
+          </a:p>
+          <a:p>
+            <a:endParaRPr lang="en-IE" dirty="0"/>
+          </a:p>
+        </p:txBody>
+      </p:sp>
+      <p:pic>
+        <p:nvPicPr>
+          <p:cNvPr id="15" name="Picture 14">
+            <a:extLst>
+              <a:ext uri="{FF2B5EF4-FFF2-40B4-BE49-F238E27FC236}">
+                <a16:creationId xmlns:a16="http://schemas.microsoft.com/office/drawing/2014/main" id="{9C8697CD-C7FD-0740-BAE5-5A901F8131AD}"/>
+              </a:ext>
+            </a:extLst>
+          </p:cNvPr>
+          <p:cNvPicPr>
+            <a:picLocks noChangeAspect="1"/>
+          </p:cNvPicPr>
+          <p:nvPr/>
+        </p:nvPicPr>
+        <p:blipFill>
+          <a:blip r:embed="rId2"/>
+          <a:stretch>
+            <a:fillRect/>
+          </a:stretch>
+        </p:blipFill>
+        <p:spPr>
+          <a:xfrm>
+            <a:off x="2362200" y="2667000"/>
+            <a:ext cx="2476846" cy="4134427"/>
+          </a:xfrm>
+          <a:prstGeom prst="rect">
+            <a:avLst/>
+          </a:prstGeom>
+        </p:spPr>
+      </p:pic>
+      <p:pic>
+        <p:nvPicPr>
+          <p:cNvPr id="17" name="Picture 16">
+            <a:extLst>
+              <a:ext uri="{FF2B5EF4-FFF2-40B4-BE49-F238E27FC236}">
+                <a16:creationId xmlns:a16="http://schemas.microsoft.com/office/drawing/2014/main" id="{23025BBB-B915-17E8-078C-5054ADA8FF1F}"/>
+              </a:ext>
+            </a:extLst>
+          </p:cNvPr>
+          <p:cNvPicPr>
+            <a:picLocks noChangeAspect="1"/>
+          </p:cNvPicPr>
+          <p:nvPr/>
+        </p:nvPicPr>
+        <p:blipFill>
+          <a:blip r:embed="rId3"/>
+          <a:stretch>
+            <a:fillRect/>
+          </a:stretch>
+        </p:blipFill>
+        <p:spPr>
+          <a:xfrm>
+            <a:off x="5029200" y="1551792"/>
+            <a:ext cx="7008879" cy="5306208"/>
+          </a:xfrm>
+          <a:prstGeom prst="rect">
+            <a:avLst/>
+          </a:prstGeom>
+        </p:spPr>
+      </p:pic>
+    </p:spTree>
+    <p:extLst>
+      <p:ext uri="{BB962C8B-B14F-4D97-AF65-F5344CB8AC3E}">
+        <p14:creationId xmlns:p14="http://schemas.microsoft.com/office/powerpoint/2010/main" val="3661995497"/>
+      </p:ext>
+    </p:extLst>
+  </p:cSld>
+  <p:clrMapOvr>
+    <a:masterClrMapping/>
+  </p:clrMapOvr>
+  <p:timing>
+    <p:tnLst>
+      <p:par>
+        <p:cTn id="1" dur="indefinite" restart="never" nodeType="tmRoot">
+          <p:childTnLst>
+            <p:seq concurrent="1" nextAc="seek">
+              <p:cTn id="2" dur="indefinite" nodeType="mainSeq">
+                <p:childTnLst>
+                  <p:par>
+                    <p:cTn id="3" fill="hold">
+                      <p:stCondLst>
+                        <p:cond delay="indefinite"/>
+                      </p:stCondLst>
+                      <p:childTnLst>
                         <p:par>
-                          <p:cTn id="23" fill="hold">
+                          <p:cTn id="4" fill="hold">
                             <p:stCondLst>
                               <p:cond delay="0"/>
                             </p:stCondLst>
                             <p:childTnLst>
                               <p:par>
-                                <p:cTn id="24" presetID="1" presetClass="entr" presetSubtype="0" fill="hold" nodeType="afterEffect">
+                                <p:cTn id="5" presetID="1" presetClass="entr" presetSubtype="0" fill="hold" grpId="0" nodeType="clickEffect">
                                   <p:stCondLst>
                                     <p:cond delay="0"/>
                                   </p:stCondLst>
                                   <p:childTnLst>
                                     <p:set>
                                       <p:cBhvr>
-                                        <p:cTn id="25" dur="1" fill="hold">
+                                        <p:cTn id="6" dur="1" fill="hold">
+                                          <p:stCondLst>
+                                            <p:cond delay="0"/>
+                                          </p:stCondLst>
+                                        </p:cTn>
+                                        <p:tgtEl>
+                                          <p:spTgt spid="6">
+                                            <p:txEl>
+                                              <p:pRg st="0" end="0"/>
+                                            </p:txEl>
+                                          </p:spTgt>
+                                        </p:tgtEl>
+                                        <p:attrNameLst>
+                                          <p:attrName>style.visibility</p:attrName>
+                                        </p:attrNameLst>
+                                      </p:cBhvr>
+                                      <p:to>
+                                        <p:strVal val="visible"/>
+                                      </p:to>
+                                    </p:set>
+                                  </p:childTnLst>
+                                </p:cTn>
+                              </p:par>
+                            </p:childTnLst>
+                          </p:cTn>
+                        </p:par>
+                        <p:par>
+                          <p:cTn id="7" fill="hold">
+                            <p:stCondLst>
+                              <p:cond delay="0"/>
+                            </p:stCondLst>
+                            <p:childTnLst>
+                              <p:par>
+                                <p:cTn id="8" presetID="1" presetClass="entr" presetSubtype="0" fill="hold" nodeType="afterEffect">
+                                  <p:stCondLst>
+                                    <p:cond delay="0"/>
+                                  </p:stCondLst>
+                                  <p:childTnLst>
+                                    <p:set>
+                                      <p:cBhvr>
+                                        <p:cTn id="9" dur="1" fill="hold">
                                           <p:stCondLst>
                                             <p:cond delay="0"/>
                                           </p:stCondLst>
@@ -5270,26 +5637,26 @@
                     </p:cTn>
                   </p:par>
                   <p:par>
-                    <p:cTn id="26" fill="hold">
+                    <p:cTn id="10" fill="hold">
                       <p:stCondLst>
                         <p:cond delay="indefinite"/>
                       </p:stCondLst>
                       <p:childTnLst>
                         <p:par>
-                          <p:cTn id="27" fill="hold">
+                          <p:cTn id="11" fill="hold">
                             <p:stCondLst>
                               <p:cond delay="0"/>
                             </p:stCondLst>
                             <p:childTnLst>
                               <p:par>
-                                <p:cTn id="28" presetID="1" presetClass="entr" presetSubtype="0" fill="hold" nodeType="clickEffect">
+                                <p:cTn id="12" presetID="1" presetClass="entr" presetSubtype="0" fill="hold" nodeType="clickEffect">
                                   <p:stCondLst>
                                     <p:cond delay="0"/>
                                   </p:stCondLst>
                                   <p:childTnLst>
                                     <p:set>
                                       <p:cBhvr>
-                                        <p:cTn id="29" dur="1" fill="hold">
+                                        <p:cTn id="13" dur="1" fill="hold">
                                           <p:stCondLst>
                                             <p:cond delay="0"/>
                                           </p:stCondLst>
@@ -5342,7 +5709,7 @@
 </p:sld>
 </file>
 
-<file path=ppt/slides/slide11.xml><?xml version="1.0" encoding="utf-8"?>
+<file path=ppt/slides/slide13.xml><?xml version="1.0" encoding="utf-8"?>
 <p:sld xmlns:a="http://schemas.openxmlformats.org/drawingml/2006/main" xmlns:r="http://schemas.openxmlformats.org/officeDocument/2006/relationships" xmlns:p="http://schemas.openxmlformats.org/presentationml/2006/main">
   <p:cSld>
     <p:spTree>
@@ -5555,7 +5922,7 @@
 </p:sld>
 </file>
 
-<file path=ppt/slides/slide12.xml><?xml version="1.0" encoding="utf-8"?>
+<file path=ppt/slides/slide14.xml><?xml version="1.0" encoding="utf-8"?>
 <p:sld xmlns:a="http://schemas.openxmlformats.org/drawingml/2006/main" xmlns:r="http://schemas.openxmlformats.org/officeDocument/2006/relationships" xmlns:p="http://schemas.openxmlformats.org/presentationml/2006/main">
   <p:cSld>
     <p:spTree>
@@ -5741,7 +6108,7 @@
 </p:sld>
 </file>
 
-<file path=ppt/slides/slide13.xml><?xml version="1.0" encoding="utf-8"?>
+<file path=ppt/slides/slide15.xml><?xml version="1.0" encoding="utf-8"?>
 <p:sld xmlns:a="http://schemas.openxmlformats.org/drawingml/2006/main" xmlns:r="http://schemas.openxmlformats.org/officeDocument/2006/relationships" xmlns:p="http://schemas.openxmlformats.org/presentationml/2006/main">
   <p:cSld>
     <p:spTree>
@@ -5857,7 +6224,7 @@
 </p:sld>
 </file>
 
-<file path=ppt/slides/slide14.xml><?xml version="1.0" encoding="utf-8"?>
+<file path=ppt/slides/slide16.xml><?xml version="1.0" encoding="utf-8"?>
 <p:sld xmlns:a="http://schemas.openxmlformats.org/drawingml/2006/main" xmlns:r="http://schemas.openxmlformats.org/officeDocument/2006/relationships" xmlns:p="http://schemas.openxmlformats.org/presentationml/2006/main">
   <p:cSld>
     <p:spTree>
@@ -5980,7 +6347,7 @@
 </p:sld>
 </file>
 
-<file path=ppt/slides/slide15.xml><?xml version="1.0" encoding="utf-8"?>
+<file path=ppt/slides/slide17.xml><?xml version="1.0" encoding="utf-8"?>
 <p:sld xmlns:a="http://schemas.openxmlformats.org/drawingml/2006/main" xmlns:r="http://schemas.openxmlformats.org/officeDocument/2006/relationships" xmlns:p="http://schemas.openxmlformats.org/presentationml/2006/main">
   <p:cSld>
     <p:spTree>
@@ -6100,7 +6467,7 @@
 </p:sld>
 </file>
 
-<file path=ppt/slides/slide16.xml><?xml version="1.0" encoding="utf-8"?>
+<file path=ppt/slides/slide18.xml><?xml version="1.0" encoding="utf-8"?>
 <p:sld xmlns:a="http://schemas.openxmlformats.org/drawingml/2006/main" xmlns:r="http://schemas.openxmlformats.org/officeDocument/2006/relationships" xmlns:p="http://schemas.openxmlformats.org/presentationml/2006/main">
   <p:cSld>
     <p:spTree>

--- a/topic01-objects-and-classes/unit-1/talk-1-bluej/getting-started-bluej.pptx
+++ b/topic01-objects-and-classes/unit-1/talk-1-bluej/getting-started-bluej.pptx
@@ -2,7 +2,7 @@
 <file path=ppt/presentation.xml><?xml version="1.0" encoding="utf-8"?>
 <p:presentation xmlns:a="http://schemas.openxmlformats.org/drawingml/2006/main" xmlns:r="http://schemas.openxmlformats.org/officeDocument/2006/relationships" xmlns:p="http://schemas.openxmlformats.org/presentationml/2006/main" saveSubsetFonts="1">
   <p:sldMasterIdLst>
-    <p:sldMasterId id="2147483660" r:id="rId1"/>
+    <p:sldMasterId id="2147483672" r:id="rId1"/>
   </p:sldMasterIdLst>
   <p:notesMasterIdLst>
     <p:notesMasterId r:id="rId20"/>
@@ -225,7 +225,7 @@
           <a:p>
             <a:fld id="{58C3D141-1E1C-433C-AD3A-CD56CBBB4F9F}" type="datetimeFigureOut">
               <a:rPr lang="en-IE" smtClean="0"/>
-              <a:t>10/09/2025</a:t>
+              <a:t>14/09/2025</a:t>
             </a:fld>
             <a:endParaRPr lang="en-IE"/>
           </a:p>
@@ -975,13 +975,7 @@
       </p:grpSpPr>
       <p:sp>
         <p:nvSpPr>
-          <p:cNvPr id="2" name="Title 1">
-            <a:extLst>
-              <a:ext uri="{FF2B5EF4-FFF2-40B4-BE49-F238E27FC236}">
-                <a16:creationId xmlns:a16="http://schemas.microsoft.com/office/drawing/2014/main" id="{88447006-F940-3831-18E3-0E2390350436}"/>
-              </a:ext>
-            </a:extLst>
-          </p:cNvPr>
+          <p:cNvPr id="2" name="Title 1"/>
           <p:cNvSpPr>
             <a:spLocks noGrp="1"/>
           </p:cNvSpPr>
@@ -991,35 +985,25 @@
         </p:nvSpPr>
         <p:spPr>
           <a:xfrm>
-            <a:off x="1524000" y="1122363"/>
-            <a:ext cx="9144000" cy="2387600"/>
-          </a:xfrm>
-        </p:spPr>
-        <p:txBody>
-          <a:bodyPr anchor="b"/>
-          <a:lstStyle>
-            <a:lvl1pPr algn="ctr">
-              <a:defRPr sz="6000"/>
-            </a:lvl1pPr>
-          </a:lstStyle>
+            <a:off x="914400" y="2130426"/>
+            <a:ext cx="10363200" cy="1470025"/>
+          </a:xfrm>
+        </p:spPr>
+        <p:txBody>
+          <a:bodyPr/>
+          <a:lstStyle/>
           <a:p>
             <a:r>
               <a:rPr lang="en-GB"/>
               <a:t>Click to edit Master title style</a:t>
             </a:r>
-            <a:endParaRPr lang="en-US"/>
-          </a:p>
-        </p:txBody>
-      </p:sp>
-      <p:sp>
-        <p:nvSpPr>
-          <p:cNvPr id="3" name="Subtitle 2">
-            <a:extLst>
-              <a:ext uri="{FF2B5EF4-FFF2-40B4-BE49-F238E27FC236}">
-                <a16:creationId xmlns:a16="http://schemas.microsoft.com/office/drawing/2014/main" id="{3411FEC5-24F0-BFB2-886C-05E7A239D6C2}"/>
-              </a:ext>
-            </a:extLst>
-          </p:cNvPr>
+            <a:endParaRPr lang="en-US" dirty="0"/>
+          </a:p>
+        </p:txBody>
+      </p:sp>
+      <p:sp>
+        <p:nvSpPr>
+          <p:cNvPr id="3" name="Subtitle 2"/>
           <p:cNvSpPr>
             <a:spLocks noGrp="1"/>
           </p:cNvSpPr>
@@ -1029,8 +1013,8 @@
         </p:nvSpPr>
         <p:spPr>
           <a:xfrm>
-            <a:off x="1524000" y="3602038"/>
-            <a:ext cx="9144000" cy="1655762"/>
+            <a:off x="1828800" y="3886200"/>
+            <a:ext cx="8534400" cy="1752600"/>
           </a:xfrm>
         </p:spPr>
         <p:txBody>
@@ -1038,39 +1022,93 @@
           <a:lstStyle>
             <a:lvl1pPr marL="0" indent="0" algn="ctr">
               <a:buNone/>
-              <a:defRPr sz="2400"/>
+              <a:defRPr>
+                <a:solidFill>
+                  <a:schemeClr val="tx1">
+                    <a:tint val="75000"/>
+                  </a:schemeClr>
+                </a:solidFill>
+              </a:defRPr>
             </a:lvl1pPr>
             <a:lvl2pPr marL="457200" indent="0" algn="ctr">
               <a:buNone/>
-              <a:defRPr sz="2000"/>
+              <a:defRPr>
+                <a:solidFill>
+                  <a:schemeClr val="tx1">
+                    <a:tint val="75000"/>
+                  </a:schemeClr>
+                </a:solidFill>
+              </a:defRPr>
             </a:lvl2pPr>
             <a:lvl3pPr marL="914400" indent="0" algn="ctr">
               <a:buNone/>
-              <a:defRPr sz="1800"/>
+              <a:defRPr>
+                <a:solidFill>
+                  <a:schemeClr val="tx1">
+                    <a:tint val="75000"/>
+                  </a:schemeClr>
+                </a:solidFill>
+              </a:defRPr>
             </a:lvl3pPr>
             <a:lvl4pPr marL="1371600" indent="0" algn="ctr">
               <a:buNone/>
-              <a:defRPr sz="1600"/>
+              <a:defRPr>
+                <a:solidFill>
+                  <a:schemeClr val="tx1">
+                    <a:tint val="75000"/>
+                  </a:schemeClr>
+                </a:solidFill>
+              </a:defRPr>
             </a:lvl4pPr>
             <a:lvl5pPr marL="1828800" indent="0" algn="ctr">
               <a:buNone/>
-              <a:defRPr sz="1600"/>
+              <a:defRPr>
+                <a:solidFill>
+                  <a:schemeClr val="tx1">
+                    <a:tint val="75000"/>
+                  </a:schemeClr>
+                </a:solidFill>
+              </a:defRPr>
             </a:lvl5pPr>
             <a:lvl6pPr marL="2286000" indent="0" algn="ctr">
               <a:buNone/>
-              <a:defRPr sz="1600"/>
+              <a:defRPr>
+                <a:solidFill>
+                  <a:schemeClr val="tx1">
+                    <a:tint val="75000"/>
+                  </a:schemeClr>
+                </a:solidFill>
+              </a:defRPr>
             </a:lvl6pPr>
             <a:lvl7pPr marL="2743200" indent="0" algn="ctr">
               <a:buNone/>
-              <a:defRPr sz="1600"/>
+              <a:defRPr>
+                <a:solidFill>
+                  <a:schemeClr val="tx1">
+                    <a:tint val="75000"/>
+                  </a:schemeClr>
+                </a:solidFill>
+              </a:defRPr>
             </a:lvl7pPr>
             <a:lvl8pPr marL="3200400" indent="0" algn="ctr">
               <a:buNone/>
-              <a:defRPr sz="1600"/>
+              <a:defRPr>
+                <a:solidFill>
+                  <a:schemeClr val="tx1">
+                    <a:tint val="75000"/>
+                  </a:schemeClr>
+                </a:solidFill>
+              </a:defRPr>
             </a:lvl8pPr>
             <a:lvl9pPr marL="3657600" indent="0" algn="ctr">
               <a:buNone/>
-              <a:defRPr sz="1600"/>
+              <a:defRPr>
+                <a:solidFill>
+                  <a:schemeClr val="tx1">
+                    <a:tint val="75000"/>
+                  </a:schemeClr>
+                </a:solidFill>
+              </a:defRPr>
             </a:lvl9pPr>
           </a:lstStyle>
           <a:p>
@@ -1078,19 +1116,13 @@
               <a:rPr lang="en-GB"/>
               <a:t>Click to edit Master subtitle style</a:t>
             </a:r>
-            <a:endParaRPr lang="en-US"/>
-          </a:p>
-        </p:txBody>
-      </p:sp>
-      <p:sp>
-        <p:nvSpPr>
-          <p:cNvPr id="4" name="Date Placeholder 3">
-            <a:extLst>
-              <a:ext uri="{FF2B5EF4-FFF2-40B4-BE49-F238E27FC236}">
-                <a16:creationId xmlns:a16="http://schemas.microsoft.com/office/drawing/2014/main" id="{54B1ECC4-B553-9C7F-2F34-98802FE6E9B9}"/>
-              </a:ext>
-            </a:extLst>
-          </p:cNvPr>
+            <a:endParaRPr lang="en-US" dirty="0"/>
+          </a:p>
+        </p:txBody>
+      </p:sp>
+      <p:sp>
+        <p:nvSpPr>
+          <p:cNvPr id="4" name="Date Placeholder 3"/>
           <p:cNvSpPr>
             <a:spLocks noGrp="1"/>
           </p:cNvSpPr>
@@ -1106,7 +1138,7 @@
             <a:fld id="{1D8BD707-D9CF-40AE-B4C6-C98DA3205C09}" type="datetimeFigureOut">
               <a:rPr lang="en-US" smtClean="0"/>
               <a:pPr/>
-              <a:t>9/10/2025</a:t>
+              <a:t>9/14/25</a:t>
             </a:fld>
             <a:endParaRPr lang="en-US"/>
           </a:p>
@@ -1114,13 +1146,7 @@
       </p:sp>
       <p:sp>
         <p:nvSpPr>
-          <p:cNvPr id="5" name="Footer Placeholder 4">
-            <a:extLst>
-              <a:ext uri="{FF2B5EF4-FFF2-40B4-BE49-F238E27FC236}">
-                <a16:creationId xmlns:a16="http://schemas.microsoft.com/office/drawing/2014/main" id="{E5507CA7-3D29-3CD4-6250-4F6DA41C8B20}"/>
-              </a:ext>
-            </a:extLst>
-          </p:cNvPr>
+          <p:cNvPr id="5" name="Footer Placeholder 4"/>
           <p:cNvSpPr>
             <a:spLocks noGrp="1"/>
           </p:cNvSpPr>
@@ -1139,13 +1165,7 @@
       </p:sp>
       <p:sp>
         <p:nvSpPr>
-          <p:cNvPr id="6" name="Slide Number Placeholder 5">
-            <a:extLst>
-              <a:ext uri="{FF2B5EF4-FFF2-40B4-BE49-F238E27FC236}">
-                <a16:creationId xmlns:a16="http://schemas.microsoft.com/office/drawing/2014/main" id="{1178A7BD-B9A3-F3CC-7237-65859AE7256D}"/>
-              </a:ext>
-            </a:extLst>
-          </p:cNvPr>
+          <p:cNvPr id="6" name="Slide Number Placeholder 5"/>
           <p:cNvSpPr>
             <a:spLocks noGrp="1"/>
           </p:cNvSpPr>
@@ -1170,7 +1190,7 @@
     </p:spTree>
     <p:extLst>
       <p:ext uri="{BB962C8B-B14F-4D97-AF65-F5344CB8AC3E}">
-        <p14:creationId xmlns:p14="http://schemas.microsoft.com/office/powerpoint/2010/main" val="3945058953"/>
+        <p14:creationId xmlns:p14="http://schemas.microsoft.com/office/powerpoint/2010/main" val="2468072739"/>
       </p:ext>
     </p:extLst>
   </p:cSld>
@@ -1199,13 +1219,7 @@
       </p:grpSpPr>
       <p:sp>
         <p:nvSpPr>
-          <p:cNvPr id="2" name="Title 1">
-            <a:extLst>
-              <a:ext uri="{FF2B5EF4-FFF2-40B4-BE49-F238E27FC236}">
-                <a16:creationId xmlns:a16="http://schemas.microsoft.com/office/drawing/2014/main" id="{E9C2FC2D-6224-BBC8-9353-6420F75031C8}"/>
-              </a:ext>
-            </a:extLst>
-          </p:cNvPr>
+          <p:cNvPr id="2" name="Title 1"/>
           <p:cNvSpPr>
             <a:spLocks noGrp="1"/>
           </p:cNvSpPr>
@@ -1228,13 +1242,7 @@
       </p:sp>
       <p:sp>
         <p:nvSpPr>
-          <p:cNvPr id="3" name="Vertical Text Placeholder 2">
-            <a:extLst>
-              <a:ext uri="{FF2B5EF4-FFF2-40B4-BE49-F238E27FC236}">
-                <a16:creationId xmlns:a16="http://schemas.microsoft.com/office/drawing/2014/main" id="{D32303DD-1AFE-8EEB-E295-E60B87A90D1A}"/>
-              </a:ext>
-            </a:extLst>
-          </p:cNvPr>
+          <p:cNvPr id="3" name="Vertical Text Placeholder 2"/>
           <p:cNvSpPr>
             <a:spLocks noGrp="1"/>
           </p:cNvSpPr>
@@ -1286,13 +1294,7 @@
       </p:sp>
       <p:sp>
         <p:nvSpPr>
-          <p:cNvPr id="4" name="Date Placeholder 3">
-            <a:extLst>
-              <a:ext uri="{FF2B5EF4-FFF2-40B4-BE49-F238E27FC236}">
-                <a16:creationId xmlns:a16="http://schemas.microsoft.com/office/drawing/2014/main" id="{60825390-481F-F30E-1772-AC99723A4C06}"/>
-              </a:ext>
-            </a:extLst>
-          </p:cNvPr>
+          <p:cNvPr id="4" name="Date Placeholder 3"/>
           <p:cNvSpPr>
             <a:spLocks noGrp="1"/>
           </p:cNvSpPr>
@@ -1308,7 +1310,7 @@
             <a:fld id="{1D8BD707-D9CF-40AE-B4C6-C98DA3205C09}" type="datetimeFigureOut">
               <a:rPr lang="en-US" smtClean="0"/>
               <a:pPr/>
-              <a:t>9/10/2025</a:t>
+              <a:t>9/14/25</a:t>
             </a:fld>
             <a:endParaRPr lang="en-US"/>
           </a:p>
@@ -1316,13 +1318,7 @@
       </p:sp>
       <p:sp>
         <p:nvSpPr>
-          <p:cNvPr id="5" name="Footer Placeholder 4">
-            <a:extLst>
-              <a:ext uri="{FF2B5EF4-FFF2-40B4-BE49-F238E27FC236}">
-                <a16:creationId xmlns:a16="http://schemas.microsoft.com/office/drawing/2014/main" id="{339F0693-A88A-14C8-E1B9-72DAD5054E88}"/>
-              </a:ext>
-            </a:extLst>
-          </p:cNvPr>
+          <p:cNvPr id="5" name="Footer Placeholder 4"/>
           <p:cNvSpPr>
             <a:spLocks noGrp="1"/>
           </p:cNvSpPr>
@@ -1341,13 +1337,7 @@
       </p:sp>
       <p:sp>
         <p:nvSpPr>
-          <p:cNvPr id="6" name="Slide Number Placeholder 5">
-            <a:extLst>
-              <a:ext uri="{FF2B5EF4-FFF2-40B4-BE49-F238E27FC236}">
-                <a16:creationId xmlns:a16="http://schemas.microsoft.com/office/drawing/2014/main" id="{0FB0D594-F510-DCA2-CA50-DE66A2341DD7}"/>
-              </a:ext>
-            </a:extLst>
-          </p:cNvPr>
+          <p:cNvPr id="6" name="Slide Number Placeholder 5"/>
           <p:cNvSpPr>
             <a:spLocks noGrp="1"/>
           </p:cNvSpPr>
@@ -1372,7 +1362,7 @@
     </p:spTree>
     <p:extLst>
       <p:ext uri="{BB962C8B-B14F-4D97-AF65-F5344CB8AC3E}">
-        <p14:creationId xmlns:p14="http://schemas.microsoft.com/office/powerpoint/2010/main" val="3425526996"/>
+        <p14:creationId xmlns:p14="http://schemas.microsoft.com/office/powerpoint/2010/main" val="1053790594"/>
       </p:ext>
     </p:extLst>
   </p:cSld>
@@ -1401,13 +1391,7 @@
       </p:grpSpPr>
       <p:sp>
         <p:nvSpPr>
-          <p:cNvPr id="2" name="Vertical Title 1">
-            <a:extLst>
-              <a:ext uri="{FF2B5EF4-FFF2-40B4-BE49-F238E27FC236}">
-                <a16:creationId xmlns:a16="http://schemas.microsoft.com/office/drawing/2014/main" id="{FEE920F5-D058-1038-AA1B-E8CDE8465A2D}"/>
-              </a:ext>
-            </a:extLst>
-          </p:cNvPr>
+          <p:cNvPr id="2" name="Vertical Title 1"/>
           <p:cNvSpPr>
             <a:spLocks noGrp="1"/>
           </p:cNvSpPr>
@@ -1417,8 +1401,8 @@
         </p:nvSpPr>
         <p:spPr>
           <a:xfrm>
-            <a:off x="8724900" y="365125"/>
-            <a:ext cx="2628900" cy="5811838"/>
+            <a:off x="8839200" y="274639"/>
+            <a:ext cx="2743200" cy="5851525"/>
           </a:xfrm>
         </p:spPr>
         <p:txBody>
@@ -1435,13 +1419,7 @@
       </p:sp>
       <p:sp>
         <p:nvSpPr>
-          <p:cNvPr id="3" name="Vertical Text Placeholder 2">
-            <a:extLst>
-              <a:ext uri="{FF2B5EF4-FFF2-40B4-BE49-F238E27FC236}">
-                <a16:creationId xmlns:a16="http://schemas.microsoft.com/office/drawing/2014/main" id="{95D19B4D-966A-C0A3-DE7E-F0FB34E73A2F}"/>
-              </a:ext>
-            </a:extLst>
-          </p:cNvPr>
+          <p:cNvPr id="3" name="Vertical Text Placeholder 2"/>
           <p:cNvSpPr>
             <a:spLocks noGrp="1"/>
           </p:cNvSpPr>
@@ -1451,8 +1429,8 @@
         </p:nvSpPr>
         <p:spPr>
           <a:xfrm>
-            <a:off x="838200" y="365125"/>
-            <a:ext cx="7734300" cy="5811838"/>
+            <a:off x="609600" y="274639"/>
+            <a:ext cx="8026400" cy="5851525"/>
           </a:xfrm>
         </p:spPr>
         <p:txBody>
@@ -1498,13 +1476,7 @@
       </p:sp>
       <p:sp>
         <p:nvSpPr>
-          <p:cNvPr id="4" name="Date Placeholder 3">
-            <a:extLst>
-              <a:ext uri="{FF2B5EF4-FFF2-40B4-BE49-F238E27FC236}">
-                <a16:creationId xmlns:a16="http://schemas.microsoft.com/office/drawing/2014/main" id="{6A2926B8-242D-18CC-A581-F2754C4A47C9}"/>
-              </a:ext>
-            </a:extLst>
-          </p:cNvPr>
+          <p:cNvPr id="4" name="Date Placeholder 3"/>
           <p:cNvSpPr>
             <a:spLocks noGrp="1"/>
           </p:cNvSpPr>
@@ -1520,7 +1492,7 @@
             <a:fld id="{1D8BD707-D9CF-40AE-B4C6-C98DA3205C09}" type="datetimeFigureOut">
               <a:rPr lang="en-US" smtClean="0"/>
               <a:pPr/>
-              <a:t>9/10/2025</a:t>
+              <a:t>9/14/25</a:t>
             </a:fld>
             <a:endParaRPr lang="en-US"/>
           </a:p>
@@ -1528,13 +1500,7 @@
       </p:sp>
       <p:sp>
         <p:nvSpPr>
-          <p:cNvPr id="5" name="Footer Placeholder 4">
-            <a:extLst>
-              <a:ext uri="{FF2B5EF4-FFF2-40B4-BE49-F238E27FC236}">
-                <a16:creationId xmlns:a16="http://schemas.microsoft.com/office/drawing/2014/main" id="{AD7F2AFB-4CC8-BEBF-4E39-3BC02B5F73DA}"/>
-              </a:ext>
-            </a:extLst>
-          </p:cNvPr>
+          <p:cNvPr id="5" name="Footer Placeholder 4"/>
           <p:cNvSpPr>
             <a:spLocks noGrp="1"/>
           </p:cNvSpPr>
@@ -1553,13 +1519,7 @@
       </p:sp>
       <p:sp>
         <p:nvSpPr>
-          <p:cNvPr id="6" name="Slide Number Placeholder 5">
-            <a:extLst>
-              <a:ext uri="{FF2B5EF4-FFF2-40B4-BE49-F238E27FC236}">
-                <a16:creationId xmlns:a16="http://schemas.microsoft.com/office/drawing/2014/main" id="{2FFE73DB-0D29-0E88-CA55-8C3B7EE99E9F}"/>
-              </a:ext>
-            </a:extLst>
-          </p:cNvPr>
+          <p:cNvPr id="6" name="Slide Number Placeholder 5"/>
           <p:cNvSpPr>
             <a:spLocks noGrp="1"/>
           </p:cNvSpPr>
@@ -1584,7 +1544,148 @@
     </p:spTree>
     <p:extLst>
       <p:ext uri="{BB962C8B-B14F-4D97-AF65-F5344CB8AC3E}">
-        <p14:creationId xmlns:p14="http://schemas.microsoft.com/office/powerpoint/2010/main" val="2231801922"/>
+        <p14:creationId xmlns:p14="http://schemas.microsoft.com/office/powerpoint/2010/main" val="2231088388"/>
+      </p:ext>
+    </p:extLst>
+  </p:cSld>
+  <p:clrMapOvr>
+    <a:masterClrMapping/>
+  </p:clrMapOvr>
+</p:sldLayout>
+</file>
+
+<file path=ppt/slideLayouts/slideLayout12.xml><?xml version="1.0" encoding="utf-8"?>
+<p:sldLayout xmlns:a="http://schemas.openxmlformats.org/drawingml/2006/main" xmlns:r="http://schemas.openxmlformats.org/officeDocument/2006/relationships" xmlns:p="http://schemas.openxmlformats.org/presentationml/2006/main" type="tx">
+  <p:cSld name="Title &amp; Bullets">
+    <p:spTree>
+      <p:nvGrpSpPr>
+        <p:cNvPr id="1" name=""/>
+        <p:cNvGrpSpPr/>
+        <p:nvPr/>
+      </p:nvGrpSpPr>
+      <p:grpSpPr>
+        <a:xfrm>
+          <a:off x="0" y="0"/>
+          <a:ext cx="0" cy="0"/>
+          <a:chOff x="0" y="0"/>
+          <a:chExt cx="0" cy="0"/>
+        </a:xfrm>
+      </p:grpSpPr>
+      <p:sp>
+        <p:nvSpPr>
+          <p:cNvPr id="22" name="Shape 22"/>
+          <p:cNvSpPr>
+            <a:spLocks noGrp="1"/>
+          </p:cNvSpPr>
+          <p:nvPr>
+            <p:ph type="title"/>
+          </p:nvPr>
+        </p:nvSpPr>
+        <p:spPr>
+          <a:prstGeom prst="rect">
+            <a:avLst/>
+          </a:prstGeom>
+        </p:spPr>
+        <p:txBody>
+          <a:bodyPr/>
+          <a:lstStyle/>
+          <a:p>
+            <a:r>
+              <a:rPr lang="en-GB"/>
+              <a:t>Click to edit Master title style</a:t>
+            </a:r>
+            <a:endParaRPr/>
+          </a:p>
+        </p:txBody>
+      </p:sp>
+      <p:sp>
+        <p:nvSpPr>
+          <p:cNvPr id="23" name="Shape 23"/>
+          <p:cNvSpPr>
+            <a:spLocks noGrp="1"/>
+          </p:cNvSpPr>
+          <p:nvPr>
+            <p:ph type="body" idx="1"/>
+          </p:nvPr>
+        </p:nvSpPr>
+        <p:spPr>
+          <a:prstGeom prst="rect">
+            <a:avLst/>
+          </a:prstGeom>
+        </p:spPr>
+        <p:txBody>
+          <a:bodyPr/>
+          <a:lstStyle/>
+          <a:p>
+            <a:pPr lvl="0"/>
+            <a:r>
+              <a:rPr lang="en-GB"/>
+              <a:t>Click to edit Master text styles</a:t>
+            </a:r>
+          </a:p>
+          <a:p>
+            <a:pPr lvl="1"/>
+            <a:r>
+              <a:rPr lang="en-GB"/>
+              <a:t>Second level</a:t>
+            </a:r>
+          </a:p>
+          <a:p>
+            <a:pPr lvl="2"/>
+            <a:r>
+              <a:rPr lang="en-GB"/>
+              <a:t>Third level</a:t>
+            </a:r>
+          </a:p>
+          <a:p>
+            <a:pPr lvl="3"/>
+            <a:r>
+              <a:rPr lang="en-GB"/>
+              <a:t>Fourth level</a:t>
+            </a:r>
+          </a:p>
+          <a:p>
+            <a:pPr lvl="4"/>
+            <a:r>
+              <a:rPr lang="en-GB"/>
+              <a:t>Fifth level</a:t>
+            </a:r>
+            <a:endParaRPr/>
+          </a:p>
+        </p:txBody>
+      </p:sp>
+      <p:sp>
+        <p:nvSpPr>
+          <p:cNvPr id="24" name="Shape 24"/>
+          <p:cNvSpPr>
+            <a:spLocks noGrp="1"/>
+          </p:cNvSpPr>
+          <p:nvPr>
+            <p:ph type="sldNum" sz="quarter" idx="2"/>
+          </p:nvPr>
+        </p:nvSpPr>
+        <p:spPr>
+          <a:prstGeom prst="rect">
+            <a:avLst/>
+          </a:prstGeom>
+        </p:spPr>
+        <p:txBody>
+          <a:bodyPr/>
+          <a:lstStyle/>
+          <a:p>
+            <a:fld id="{B6F15528-21DE-4FAA-801E-634DDDAF4B2B}" type="slidenum">
+              <a:rPr lang="en-US" smtClean="0"/>
+              <a:pPr/>
+              <a:t>‹#›</a:t>
+            </a:fld>
+            <a:endParaRPr lang="en-US"/>
+          </a:p>
+        </p:txBody>
+      </p:sp>
+    </p:spTree>
+    <p:extLst>
+      <p:ext uri="{BB962C8B-B14F-4D97-AF65-F5344CB8AC3E}">
+        <p14:creationId xmlns:p14="http://schemas.microsoft.com/office/powerpoint/2010/main" val="1353839477"/>
       </p:ext>
     </p:extLst>
   </p:cSld>
@@ -1613,13 +1714,7 @@
       </p:grpSpPr>
       <p:sp>
         <p:nvSpPr>
-          <p:cNvPr id="2" name="Title 1">
-            <a:extLst>
-              <a:ext uri="{FF2B5EF4-FFF2-40B4-BE49-F238E27FC236}">
-                <a16:creationId xmlns:a16="http://schemas.microsoft.com/office/drawing/2014/main" id="{98D5B365-9F5F-9E5E-16A4-58937D4A8A7A}"/>
-              </a:ext>
-            </a:extLst>
-          </p:cNvPr>
+          <p:cNvPr id="2" name="Title 1"/>
           <p:cNvSpPr>
             <a:spLocks noGrp="1"/>
           </p:cNvSpPr>
@@ -1630,25 +1725,30 @@
         <p:spPr/>
         <p:txBody>
           <a:bodyPr/>
-          <a:lstStyle/>
+          <a:lstStyle>
+            <a:lvl1pPr algn="l">
+              <a:defRPr>
+                <a:solidFill>
+                  <a:schemeClr val="tx1">
+                    <a:lumMod val="65000"/>
+                    <a:lumOff val="35000"/>
+                  </a:schemeClr>
+                </a:solidFill>
+              </a:defRPr>
+            </a:lvl1pPr>
+          </a:lstStyle>
           <a:p>
             <a:r>
               <a:rPr lang="en-GB"/>
               <a:t>Click to edit Master title style</a:t>
             </a:r>
-            <a:endParaRPr lang="en-US"/>
-          </a:p>
-        </p:txBody>
-      </p:sp>
-      <p:sp>
-        <p:nvSpPr>
-          <p:cNvPr id="3" name="Content Placeholder 2">
-            <a:extLst>
-              <a:ext uri="{FF2B5EF4-FFF2-40B4-BE49-F238E27FC236}">
-                <a16:creationId xmlns:a16="http://schemas.microsoft.com/office/drawing/2014/main" id="{B0E033D9-C7C5-52DE-E2E8-4CC77790274E}"/>
-              </a:ext>
-            </a:extLst>
-          </p:cNvPr>
+            <a:endParaRPr lang="en-US" dirty="0"/>
+          </a:p>
+        </p:txBody>
+      </p:sp>
+      <p:sp>
+        <p:nvSpPr>
+          <p:cNvPr id="3" name="Content Placeholder 2"/>
           <p:cNvSpPr>
             <a:spLocks noGrp="1"/>
           </p:cNvSpPr>
@@ -1700,13 +1800,7 @@
       </p:sp>
       <p:sp>
         <p:nvSpPr>
-          <p:cNvPr id="4" name="Date Placeholder 3">
-            <a:extLst>
-              <a:ext uri="{FF2B5EF4-FFF2-40B4-BE49-F238E27FC236}">
-                <a16:creationId xmlns:a16="http://schemas.microsoft.com/office/drawing/2014/main" id="{F909FBFC-900A-CC7D-1FF2-A33CC67831D4}"/>
-              </a:ext>
-            </a:extLst>
-          </p:cNvPr>
+          <p:cNvPr id="4" name="Date Placeholder 3"/>
           <p:cNvSpPr>
             <a:spLocks noGrp="1"/>
           </p:cNvSpPr>
@@ -1722,7 +1816,7 @@
             <a:fld id="{1D8BD707-D9CF-40AE-B4C6-C98DA3205C09}" type="datetimeFigureOut">
               <a:rPr lang="en-US" smtClean="0"/>
               <a:pPr/>
-              <a:t>9/10/2025</a:t>
+              <a:t>9/14/25</a:t>
             </a:fld>
             <a:endParaRPr lang="en-US"/>
           </a:p>
@@ -1730,13 +1824,7 @@
       </p:sp>
       <p:sp>
         <p:nvSpPr>
-          <p:cNvPr id="5" name="Footer Placeholder 4">
-            <a:extLst>
-              <a:ext uri="{FF2B5EF4-FFF2-40B4-BE49-F238E27FC236}">
-                <a16:creationId xmlns:a16="http://schemas.microsoft.com/office/drawing/2014/main" id="{E93DD169-2948-CBC9-9651-768BEBD9032F}"/>
-              </a:ext>
-            </a:extLst>
-          </p:cNvPr>
+          <p:cNvPr id="5" name="Footer Placeholder 4"/>
           <p:cNvSpPr>
             <a:spLocks noGrp="1"/>
           </p:cNvSpPr>
@@ -1755,13 +1843,7 @@
       </p:sp>
       <p:sp>
         <p:nvSpPr>
-          <p:cNvPr id="6" name="Slide Number Placeholder 5">
-            <a:extLst>
-              <a:ext uri="{FF2B5EF4-FFF2-40B4-BE49-F238E27FC236}">
-                <a16:creationId xmlns:a16="http://schemas.microsoft.com/office/drawing/2014/main" id="{C1220BFD-6540-8449-CBC4-76231FF41EF5}"/>
-              </a:ext>
-            </a:extLst>
-          </p:cNvPr>
+          <p:cNvPr id="6" name="Slide Number Placeholder 5"/>
           <p:cNvSpPr>
             <a:spLocks noGrp="1"/>
           </p:cNvSpPr>
@@ -1785,10 +1867,92 @@
       </p:sp>
       <p:cxnSp>
         <p:nvCxnSpPr>
-          <p:cNvPr id="7" name="Straight Connector 6">
+          <p:cNvPr id="7" name="Straight Connector 6"/>
+          <p:cNvCxnSpPr/>
+          <p:nvPr/>
+        </p:nvCxnSpPr>
+        <p:spPr>
+          <a:xfrm>
+            <a:off x="609600" y="1447800"/>
+            <a:ext cx="11074400" cy="0"/>
+          </a:xfrm>
+          <a:prstGeom prst="line">
+            <a:avLst/>
+          </a:prstGeom>
+          <a:ln w="12700">
+            <a:solidFill>
+              <a:schemeClr val="tx1">
+                <a:lumMod val="50000"/>
+                <a:lumOff val="50000"/>
+              </a:schemeClr>
+            </a:solidFill>
+          </a:ln>
+        </p:spPr>
+        <p:style>
+          <a:lnRef idx="1">
+            <a:schemeClr val="accent1"/>
+          </a:lnRef>
+          <a:fillRef idx="0">
+            <a:schemeClr val="accent1"/>
+          </a:fillRef>
+          <a:effectRef idx="0">
+            <a:schemeClr val="accent1"/>
+          </a:effectRef>
+          <a:fontRef idx="minor">
+            <a:schemeClr val="tx1"/>
+          </a:fontRef>
+        </p:style>
+      </p:cxnSp>
+      <p:cxnSp>
+        <p:nvCxnSpPr>
+          <p:cNvPr id="8" name="Straight Connector 7">
             <a:extLst>
               <a:ext uri="{FF2B5EF4-FFF2-40B4-BE49-F238E27FC236}">
-                <a16:creationId xmlns:a16="http://schemas.microsoft.com/office/drawing/2014/main" id="{2CA3F45A-CC8F-9C81-8BB3-6347694AEFA2}"/>
+                <a16:creationId xmlns:a16="http://schemas.microsoft.com/office/drawing/2014/main" id="{A54FA624-7CFC-3CFB-8384-E3FA99B20E94}"/>
+              </a:ext>
+            </a:extLst>
+          </p:cNvPr>
+          <p:cNvCxnSpPr/>
+          <p:nvPr/>
+        </p:nvCxnSpPr>
+        <p:spPr>
+          <a:xfrm>
+            <a:off x="609600" y="1447800"/>
+            <a:ext cx="11074400" cy="0"/>
+          </a:xfrm>
+          <a:prstGeom prst="line">
+            <a:avLst/>
+          </a:prstGeom>
+          <a:ln w="12700">
+            <a:solidFill>
+              <a:schemeClr val="tx1">
+                <a:lumMod val="50000"/>
+                <a:lumOff val="50000"/>
+              </a:schemeClr>
+            </a:solidFill>
+          </a:ln>
+        </p:spPr>
+        <p:style>
+          <a:lnRef idx="1">
+            <a:schemeClr val="accent1"/>
+          </a:lnRef>
+          <a:fillRef idx="0">
+            <a:schemeClr val="accent1"/>
+          </a:fillRef>
+          <a:effectRef idx="0">
+            <a:schemeClr val="accent1"/>
+          </a:effectRef>
+          <a:fontRef idx="minor">
+            <a:schemeClr val="tx1"/>
+          </a:fontRef>
+        </p:style>
+      </p:cxnSp>
+      <p:cxnSp>
+        <p:nvCxnSpPr>
+          <p:cNvPr id="9" name="Straight Connector 8">
+            <a:extLst>
+              <a:ext uri="{FF2B5EF4-FFF2-40B4-BE49-F238E27FC236}">
+                <a16:creationId xmlns:a16="http://schemas.microsoft.com/office/drawing/2014/main" id="{9C51F014-A304-3672-EB37-723E4843A104}"/>
               </a:ext>
             </a:extLst>
           </p:cNvPr>
@@ -1830,7 +1994,7 @@
     </p:spTree>
     <p:extLst>
       <p:ext uri="{BB962C8B-B14F-4D97-AF65-F5344CB8AC3E}">
-        <p14:creationId xmlns:p14="http://schemas.microsoft.com/office/powerpoint/2010/main" val="576420670"/>
+        <p14:creationId xmlns:p14="http://schemas.microsoft.com/office/powerpoint/2010/main" val="3380537409"/>
       </p:ext>
     </p:extLst>
   </p:cSld>
@@ -1859,13 +2023,7 @@
       </p:grpSpPr>
       <p:sp>
         <p:nvSpPr>
-          <p:cNvPr id="2" name="Title 1">
-            <a:extLst>
-              <a:ext uri="{FF2B5EF4-FFF2-40B4-BE49-F238E27FC236}">
-                <a16:creationId xmlns:a16="http://schemas.microsoft.com/office/drawing/2014/main" id="{F888A02C-D57E-45E4-558F-252CAD2CBCF0}"/>
-              </a:ext>
-            </a:extLst>
-          </p:cNvPr>
+          <p:cNvPr id="2" name="Title 1"/>
           <p:cNvSpPr>
             <a:spLocks noGrp="1"/>
           </p:cNvSpPr>
@@ -1875,15 +2033,15 @@
         </p:nvSpPr>
         <p:spPr>
           <a:xfrm>
-            <a:off x="831850" y="1709738"/>
-            <a:ext cx="10515600" cy="2852737"/>
-          </a:xfrm>
-        </p:spPr>
-        <p:txBody>
-          <a:bodyPr anchor="b"/>
+            <a:off x="963084" y="4406901"/>
+            <a:ext cx="10363200" cy="1362075"/>
+          </a:xfrm>
+        </p:spPr>
+        <p:txBody>
+          <a:bodyPr anchor="t"/>
           <a:lstStyle>
-            <a:lvl1pPr>
-              <a:defRPr sz="6000"/>
+            <a:lvl1pPr algn="l">
+              <a:defRPr sz="4000" b="1" cap="all"/>
             </a:lvl1pPr>
           </a:lstStyle>
           <a:p>
@@ -1897,13 +2055,7 @@
       </p:sp>
       <p:sp>
         <p:nvSpPr>
-          <p:cNvPr id="3" name="Text Placeholder 2">
-            <a:extLst>
-              <a:ext uri="{FF2B5EF4-FFF2-40B4-BE49-F238E27FC236}">
-                <a16:creationId xmlns:a16="http://schemas.microsoft.com/office/drawing/2014/main" id="{C2948AFD-9AD5-4EEF-28FD-850C5EA3C0D6}"/>
-              </a:ext>
-            </a:extLst>
-          </p:cNvPr>
+          <p:cNvPr id="3" name="Text Placeholder 2"/>
           <p:cNvSpPr>
             <a:spLocks noGrp="1"/>
           </p:cNvSpPr>
@@ -1913,16 +2065,16 @@
         </p:nvSpPr>
         <p:spPr>
           <a:xfrm>
-            <a:off x="831850" y="4589463"/>
-            <a:ext cx="10515600" cy="1500187"/>
-          </a:xfrm>
-        </p:spPr>
-        <p:txBody>
-          <a:bodyPr/>
+            <a:off x="963084" y="2906713"/>
+            <a:ext cx="10363200" cy="1500187"/>
+          </a:xfrm>
+        </p:spPr>
+        <p:txBody>
+          <a:bodyPr anchor="b"/>
           <a:lstStyle>
             <a:lvl1pPr marL="0" indent="0">
               <a:buNone/>
-              <a:defRPr sz="2400">
+              <a:defRPr sz="2000">
                 <a:solidFill>
                   <a:schemeClr val="tx1">
                     <a:tint val="75000"/>
@@ -1932,7 +2084,7 @@
             </a:lvl1pPr>
             <a:lvl2pPr marL="457200" indent="0">
               <a:buNone/>
-              <a:defRPr sz="2000">
+              <a:defRPr sz="1800">
                 <a:solidFill>
                   <a:schemeClr val="tx1">
                     <a:tint val="75000"/>
@@ -1942,7 +2094,7 @@
             </a:lvl2pPr>
             <a:lvl3pPr marL="914400" indent="0">
               <a:buNone/>
-              <a:defRPr sz="1800">
+              <a:defRPr sz="1600">
                 <a:solidFill>
                   <a:schemeClr val="tx1">
                     <a:tint val="75000"/>
@@ -1952,7 +2104,7 @@
             </a:lvl3pPr>
             <a:lvl4pPr marL="1371600" indent="0">
               <a:buNone/>
-              <a:defRPr sz="1600">
+              <a:defRPr sz="1400">
                 <a:solidFill>
                   <a:schemeClr val="tx1">
                     <a:tint val="75000"/>
@@ -1962,7 +2114,7 @@
             </a:lvl4pPr>
             <a:lvl5pPr marL="1828800" indent="0">
               <a:buNone/>
-              <a:defRPr sz="1600">
+              <a:defRPr sz="1400">
                 <a:solidFill>
                   <a:schemeClr val="tx1">
                     <a:tint val="75000"/>
@@ -1972,7 +2124,7 @@
             </a:lvl5pPr>
             <a:lvl6pPr marL="2286000" indent="0">
               <a:buNone/>
-              <a:defRPr sz="1600">
+              <a:defRPr sz="1400">
                 <a:solidFill>
                   <a:schemeClr val="tx1">
                     <a:tint val="75000"/>
@@ -1982,7 +2134,7 @@
             </a:lvl6pPr>
             <a:lvl7pPr marL="2743200" indent="0">
               <a:buNone/>
-              <a:defRPr sz="1600">
+              <a:defRPr sz="1400">
                 <a:solidFill>
                   <a:schemeClr val="tx1">
                     <a:tint val="75000"/>
@@ -1992,7 +2144,7 @@
             </a:lvl7pPr>
             <a:lvl8pPr marL="3200400" indent="0">
               <a:buNone/>
-              <a:defRPr sz="1600">
+              <a:defRPr sz="1400">
                 <a:solidFill>
                   <a:schemeClr val="tx1">
                     <a:tint val="75000"/>
@@ -2002,7 +2154,7 @@
             </a:lvl8pPr>
             <a:lvl9pPr marL="3657600" indent="0">
               <a:buNone/>
-              <a:defRPr sz="1600">
+              <a:defRPr sz="1400">
                 <a:solidFill>
                   <a:schemeClr val="tx1">
                     <a:tint val="75000"/>
@@ -2022,13 +2174,7 @@
       </p:sp>
       <p:sp>
         <p:nvSpPr>
-          <p:cNvPr id="4" name="Date Placeholder 3">
-            <a:extLst>
-              <a:ext uri="{FF2B5EF4-FFF2-40B4-BE49-F238E27FC236}">
-                <a16:creationId xmlns:a16="http://schemas.microsoft.com/office/drawing/2014/main" id="{82538C9B-7C8E-29BB-212C-84F1A7BFD57C}"/>
-              </a:ext>
-            </a:extLst>
-          </p:cNvPr>
+          <p:cNvPr id="4" name="Date Placeholder 3"/>
           <p:cNvSpPr>
             <a:spLocks noGrp="1"/>
           </p:cNvSpPr>
@@ -2044,7 +2190,7 @@
             <a:fld id="{1D8BD707-D9CF-40AE-B4C6-C98DA3205C09}" type="datetimeFigureOut">
               <a:rPr lang="en-US" smtClean="0"/>
               <a:pPr/>
-              <a:t>9/10/2025</a:t>
+              <a:t>9/14/25</a:t>
             </a:fld>
             <a:endParaRPr lang="en-US"/>
           </a:p>
@@ -2052,13 +2198,7 @@
       </p:sp>
       <p:sp>
         <p:nvSpPr>
-          <p:cNvPr id="5" name="Footer Placeholder 4">
-            <a:extLst>
-              <a:ext uri="{FF2B5EF4-FFF2-40B4-BE49-F238E27FC236}">
-                <a16:creationId xmlns:a16="http://schemas.microsoft.com/office/drawing/2014/main" id="{74EBF1E9-482D-C7D7-057E-37D164160399}"/>
-              </a:ext>
-            </a:extLst>
-          </p:cNvPr>
+          <p:cNvPr id="5" name="Footer Placeholder 4"/>
           <p:cNvSpPr>
             <a:spLocks noGrp="1"/>
           </p:cNvSpPr>
@@ -2077,13 +2217,7 @@
       </p:sp>
       <p:sp>
         <p:nvSpPr>
-          <p:cNvPr id="6" name="Slide Number Placeholder 5">
-            <a:extLst>
-              <a:ext uri="{FF2B5EF4-FFF2-40B4-BE49-F238E27FC236}">
-                <a16:creationId xmlns:a16="http://schemas.microsoft.com/office/drawing/2014/main" id="{E77FBFD3-0521-0DFA-6B69-CAEF09E8C354}"/>
-              </a:ext>
-            </a:extLst>
-          </p:cNvPr>
+          <p:cNvPr id="6" name="Slide Number Placeholder 5"/>
           <p:cNvSpPr>
             <a:spLocks noGrp="1"/>
           </p:cNvSpPr>
@@ -2108,7 +2242,7 @@
     </p:spTree>
     <p:extLst>
       <p:ext uri="{BB962C8B-B14F-4D97-AF65-F5344CB8AC3E}">
-        <p14:creationId xmlns:p14="http://schemas.microsoft.com/office/powerpoint/2010/main" val="1238074783"/>
+        <p14:creationId xmlns:p14="http://schemas.microsoft.com/office/powerpoint/2010/main" val="3112830701"/>
       </p:ext>
     </p:extLst>
   </p:cSld>
@@ -2137,13 +2271,7 @@
       </p:grpSpPr>
       <p:sp>
         <p:nvSpPr>
-          <p:cNvPr id="2" name="Title 1">
-            <a:extLst>
-              <a:ext uri="{FF2B5EF4-FFF2-40B4-BE49-F238E27FC236}">
-                <a16:creationId xmlns:a16="http://schemas.microsoft.com/office/drawing/2014/main" id="{3C7CE71E-7ABE-6235-F1A8-0552C286B326}"/>
-              </a:ext>
-            </a:extLst>
-          </p:cNvPr>
+          <p:cNvPr id="2" name="Title 1"/>
           <p:cNvSpPr>
             <a:spLocks noGrp="1"/>
           </p:cNvSpPr>
@@ -2154,25 +2282,30 @@
         <p:spPr/>
         <p:txBody>
           <a:bodyPr/>
-          <a:lstStyle/>
+          <a:lstStyle>
+            <a:lvl1pPr algn="l">
+              <a:defRPr>
+                <a:solidFill>
+                  <a:schemeClr val="tx1">
+                    <a:lumMod val="65000"/>
+                    <a:lumOff val="35000"/>
+                  </a:schemeClr>
+                </a:solidFill>
+              </a:defRPr>
+            </a:lvl1pPr>
+          </a:lstStyle>
           <a:p>
             <a:r>
               <a:rPr lang="en-GB"/>
               <a:t>Click to edit Master title style</a:t>
             </a:r>
-            <a:endParaRPr lang="en-US"/>
-          </a:p>
-        </p:txBody>
-      </p:sp>
-      <p:sp>
-        <p:nvSpPr>
-          <p:cNvPr id="3" name="Content Placeholder 2">
-            <a:extLst>
-              <a:ext uri="{FF2B5EF4-FFF2-40B4-BE49-F238E27FC236}">
-                <a16:creationId xmlns:a16="http://schemas.microsoft.com/office/drawing/2014/main" id="{C7AD6BFF-CE6E-31AF-8A34-89DC7EF4A1AC}"/>
-              </a:ext>
-            </a:extLst>
-          </p:cNvPr>
+            <a:endParaRPr lang="en-US" dirty="0"/>
+          </a:p>
+        </p:txBody>
+      </p:sp>
+      <p:sp>
+        <p:nvSpPr>
+          <p:cNvPr id="3" name="Content Placeholder 2"/>
           <p:cNvSpPr>
             <a:spLocks noGrp="1"/>
           </p:cNvSpPr>
@@ -2182,13 +2315,41 @@
         </p:nvSpPr>
         <p:spPr>
           <a:xfrm>
-            <a:off x="838200" y="1825625"/>
-            <a:ext cx="5181600" cy="4351338"/>
+            <a:off x="609600" y="1600201"/>
+            <a:ext cx="5384800" cy="4525963"/>
           </a:xfrm>
         </p:spPr>
         <p:txBody>
           <a:bodyPr/>
-          <a:lstStyle/>
+          <a:lstStyle>
+            <a:lvl1pPr>
+              <a:defRPr sz="2800"/>
+            </a:lvl1pPr>
+            <a:lvl2pPr>
+              <a:defRPr sz="2400"/>
+            </a:lvl2pPr>
+            <a:lvl3pPr>
+              <a:defRPr sz="2000"/>
+            </a:lvl3pPr>
+            <a:lvl4pPr>
+              <a:defRPr sz="1800"/>
+            </a:lvl4pPr>
+            <a:lvl5pPr>
+              <a:defRPr sz="1800"/>
+            </a:lvl5pPr>
+            <a:lvl6pPr>
+              <a:defRPr sz="1800"/>
+            </a:lvl6pPr>
+            <a:lvl7pPr>
+              <a:defRPr sz="1800"/>
+            </a:lvl7pPr>
+            <a:lvl8pPr>
+              <a:defRPr sz="1800"/>
+            </a:lvl8pPr>
+            <a:lvl9pPr>
+              <a:defRPr sz="1800"/>
+            </a:lvl9pPr>
+          </a:lstStyle>
           <a:p>
             <a:pPr lvl="0"/>
             <a:r>
@@ -2229,13 +2390,7 @@
       </p:sp>
       <p:sp>
         <p:nvSpPr>
-          <p:cNvPr id="4" name="Content Placeholder 3">
-            <a:extLst>
-              <a:ext uri="{FF2B5EF4-FFF2-40B4-BE49-F238E27FC236}">
-                <a16:creationId xmlns:a16="http://schemas.microsoft.com/office/drawing/2014/main" id="{D97776FC-4A55-3469-8461-548EA492A638}"/>
-              </a:ext>
-            </a:extLst>
-          </p:cNvPr>
+          <p:cNvPr id="4" name="Content Placeholder 3"/>
           <p:cNvSpPr>
             <a:spLocks noGrp="1"/>
           </p:cNvSpPr>
@@ -2245,13 +2400,41 @@
         </p:nvSpPr>
         <p:spPr>
           <a:xfrm>
-            <a:off x="6172200" y="1825625"/>
-            <a:ext cx="5181600" cy="4351338"/>
+            <a:off x="6197600" y="1600201"/>
+            <a:ext cx="5384800" cy="4525963"/>
           </a:xfrm>
         </p:spPr>
         <p:txBody>
           <a:bodyPr/>
-          <a:lstStyle/>
+          <a:lstStyle>
+            <a:lvl1pPr>
+              <a:defRPr sz="2800"/>
+            </a:lvl1pPr>
+            <a:lvl2pPr>
+              <a:defRPr sz="2400"/>
+            </a:lvl2pPr>
+            <a:lvl3pPr>
+              <a:defRPr sz="2000"/>
+            </a:lvl3pPr>
+            <a:lvl4pPr>
+              <a:defRPr sz="1800"/>
+            </a:lvl4pPr>
+            <a:lvl5pPr>
+              <a:defRPr sz="1800"/>
+            </a:lvl5pPr>
+            <a:lvl6pPr>
+              <a:defRPr sz="1800"/>
+            </a:lvl6pPr>
+            <a:lvl7pPr>
+              <a:defRPr sz="1800"/>
+            </a:lvl7pPr>
+            <a:lvl8pPr>
+              <a:defRPr sz="1800"/>
+            </a:lvl8pPr>
+            <a:lvl9pPr>
+              <a:defRPr sz="1800"/>
+            </a:lvl9pPr>
+          </a:lstStyle>
           <a:p>
             <a:pPr lvl="0"/>
             <a:r>
@@ -2292,13 +2475,7 @@
       </p:sp>
       <p:sp>
         <p:nvSpPr>
-          <p:cNvPr id="5" name="Date Placeholder 4">
-            <a:extLst>
-              <a:ext uri="{FF2B5EF4-FFF2-40B4-BE49-F238E27FC236}">
-                <a16:creationId xmlns:a16="http://schemas.microsoft.com/office/drawing/2014/main" id="{2B5CC3EE-68E2-6C09-77C7-F4081DC431B0}"/>
-              </a:ext>
-            </a:extLst>
-          </p:cNvPr>
+          <p:cNvPr id="5" name="Date Placeholder 4"/>
           <p:cNvSpPr>
             <a:spLocks noGrp="1"/>
           </p:cNvSpPr>
@@ -2314,7 +2491,7 @@
             <a:fld id="{1D8BD707-D9CF-40AE-B4C6-C98DA3205C09}" type="datetimeFigureOut">
               <a:rPr lang="en-US" smtClean="0"/>
               <a:pPr/>
-              <a:t>9/10/2025</a:t>
+              <a:t>9/14/25</a:t>
             </a:fld>
             <a:endParaRPr lang="en-US"/>
           </a:p>
@@ -2322,13 +2499,7 @@
       </p:sp>
       <p:sp>
         <p:nvSpPr>
-          <p:cNvPr id="6" name="Footer Placeholder 5">
-            <a:extLst>
-              <a:ext uri="{FF2B5EF4-FFF2-40B4-BE49-F238E27FC236}">
-                <a16:creationId xmlns:a16="http://schemas.microsoft.com/office/drawing/2014/main" id="{7C2B55C3-4E94-FE13-3FB0-2EAD0546EA78}"/>
-              </a:ext>
-            </a:extLst>
-          </p:cNvPr>
+          <p:cNvPr id="6" name="Footer Placeholder 5"/>
           <p:cNvSpPr>
             <a:spLocks noGrp="1"/>
           </p:cNvSpPr>
@@ -2347,13 +2518,7 @@
       </p:sp>
       <p:sp>
         <p:nvSpPr>
-          <p:cNvPr id="7" name="Slide Number Placeholder 6">
-            <a:extLst>
-              <a:ext uri="{FF2B5EF4-FFF2-40B4-BE49-F238E27FC236}">
-                <a16:creationId xmlns:a16="http://schemas.microsoft.com/office/drawing/2014/main" id="{E7656D18-CBA7-61C5-D3A1-F7E83FBFDC40}"/>
-              </a:ext>
-            </a:extLst>
-          </p:cNvPr>
+          <p:cNvPr id="7" name="Slide Number Placeholder 6"/>
           <p:cNvSpPr>
             <a:spLocks noGrp="1"/>
           </p:cNvSpPr>
@@ -2377,10 +2542,86 @@
       </p:sp>
       <p:cxnSp>
         <p:nvCxnSpPr>
-          <p:cNvPr id="8" name="Straight Connector 7">
+          <p:cNvPr id="8" name="Straight Connector 7"/>
+          <p:cNvCxnSpPr/>
+          <p:nvPr/>
+        </p:nvCxnSpPr>
+        <p:spPr>
+          <a:xfrm>
+            <a:off x="609600" y="1447800"/>
+            <a:ext cx="11074400" cy="0"/>
+          </a:xfrm>
+          <a:prstGeom prst="line">
+            <a:avLst/>
+          </a:prstGeom>
+          <a:ln w="12700">
+            <a:solidFill>
+              <a:schemeClr val="tx1"/>
+            </a:solidFill>
+          </a:ln>
+        </p:spPr>
+        <p:style>
+          <a:lnRef idx="1">
+            <a:schemeClr val="accent1"/>
+          </a:lnRef>
+          <a:fillRef idx="0">
+            <a:schemeClr val="accent1"/>
+          </a:fillRef>
+          <a:effectRef idx="0">
+            <a:schemeClr val="accent1"/>
+          </a:effectRef>
+          <a:fontRef idx="minor">
+            <a:schemeClr val="tx1"/>
+          </a:fontRef>
+        </p:style>
+      </p:cxnSp>
+      <p:cxnSp>
+        <p:nvCxnSpPr>
+          <p:cNvPr id="9" name="Straight Connector 8">
             <a:extLst>
               <a:ext uri="{FF2B5EF4-FFF2-40B4-BE49-F238E27FC236}">
-                <a16:creationId xmlns:a16="http://schemas.microsoft.com/office/drawing/2014/main" id="{AB6FB45B-9CE5-72C3-9D05-66316CF25C41}"/>
+                <a16:creationId xmlns:a16="http://schemas.microsoft.com/office/drawing/2014/main" id="{0F42A16B-6893-A143-E832-A99D7B6427B3}"/>
+              </a:ext>
+            </a:extLst>
+          </p:cNvPr>
+          <p:cNvCxnSpPr/>
+          <p:nvPr/>
+        </p:nvCxnSpPr>
+        <p:spPr>
+          <a:xfrm>
+            <a:off x="609600" y="1447800"/>
+            <a:ext cx="11074400" cy="0"/>
+          </a:xfrm>
+          <a:prstGeom prst="line">
+            <a:avLst/>
+          </a:prstGeom>
+          <a:ln w="12700">
+            <a:solidFill>
+              <a:schemeClr val="tx1"/>
+            </a:solidFill>
+          </a:ln>
+        </p:spPr>
+        <p:style>
+          <a:lnRef idx="1">
+            <a:schemeClr val="accent1"/>
+          </a:lnRef>
+          <a:fillRef idx="0">
+            <a:schemeClr val="accent1"/>
+          </a:fillRef>
+          <a:effectRef idx="0">
+            <a:schemeClr val="accent1"/>
+          </a:effectRef>
+          <a:fontRef idx="minor">
+            <a:schemeClr val="tx1"/>
+          </a:fontRef>
+        </p:style>
+      </p:cxnSp>
+      <p:cxnSp>
+        <p:nvCxnSpPr>
+          <p:cNvPr id="10" name="Straight Connector 9">
+            <a:extLst>
+              <a:ext uri="{FF2B5EF4-FFF2-40B4-BE49-F238E27FC236}">
+                <a16:creationId xmlns:a16="http://schemas.microsoft.com/office/drawing/2014/main" id="{9B64861E-C2E3-2C0F-0C43-CF6F042CC211}"/>
               </a:ext>
             </a:extLst>
           </p:cNvPr>
@@ -2419,7 +2660,7 @@
     </p:spTree>
     <p:extLst>
       <p:ext uri="{BB962C8B-B14F-4D97-AF65-F5344CB8AC3E}">
-        <p14:creationId xmlns:p14="http://schemas.microsoft.com/office/powerpoint/2010/main" val="503361032"/>
+        <p14:creationId xmlns:p14="http://schemas.microsoft.com/office/powerpoint/2010/main" val="2263325753"/>
       </p:ext>
     </p:extLst>
   </p:cSld>
@@ -2448,58 +2689,52 @@
       </p:grpSpPr>
       <p:sp>
         <p:nvSpPr>
-          <p:cNvPr id="2" name="Title 1">
-            <a:extLst>
-              <a:ext uri="{FF2B5EF4-FFF2-40B4-BE49-F238E27FC236}">
-                <a16:creationId xmlns:a16="http://schemas.microsoft.com/office/drawing/2014/main" id="{C3BF13D7-FAA4-AE64-1725-09A15D28943E}"/>
-              </a:ext>
-            </a:extLst>
-          </p:cNvPr>
+          <p:cNvPr id="2" name="Title 1"/>
           <p:cNvSpPr>
             <a:spLocks noGrp="1"/>
           </p:cNvSpPr>
           <p:nvPr>
             <p:ph type="title"/>
+          </p:nvPr>
+        </p:nvSpPr>
+        <p:spPr/>
+        <p:txBody>
+          <a:bodyPr/>
+          <a:lstStyle>
+            <a:lvl1pPr algn="l">
+              <a:defRPr>
+                <a:solidFill>
+                  <a:schemeClr val="tx1">
+                    <a:lumMod val="65000"/>
+                    <a:lumOff val="35000"/>
+                  </a:schemeClr>
+                </a:solidFill>
+              </a:defRPr>
+            </a:lvl1pPr>
+          </a:lstStyle>
+          <a:p>
+            <a:r>
+              <a:rPr lang="en-GB"/>
+              <a:t>Click to edit Master title style</a:t>
+            </a:r>
+            <a:endParaRPr lang="en-US" dirty="0"/>
+          </a:p>
+        </p:txBody>
+      </p:sp>
+      <p:sp>
+        <p:nvSpPr>
+          <p:cNvPr id="3" name="Text Placeholder 2"/>
+          <p:cNvSpPr>
+            <a:spLocks noGrp="1"/>
+          </p:cNvSpPr>
+          <p:nvPr>
+            <p:ph type="body" idx="1"/>
           </p:nvPr>
         </p:nvSpPr>
         <p:spPr>
           <a:xfrm>
-            <a:off x="839788" y="365125"/>
-            <a:ext cx="10515600" cy="1325563"/>
-          </a:xfrm>
-        </p:spPr>
-        <p:txBody>
-          <a:bodyPr/>
-          <a:lstStyle/>
-          <a:p>
-            <a:r>
-              <a:rPr lang="en-GB"/>
-              <a:t>Click to edit Master title style</a:t>
-            </a:r>
-            <a:endParaRPr lang="en-US"/>
-          </a:p>
-        </p:txBody>
-      </p:sp>
-      <p:sp>
-        <p:nvSpPr>
-          <p:cNvPr id="3" name="Text Placeholder 2">
-            <a:extLst>
-              <a:ext uri="{FF2B5EF4-FFF2-40B4-BE49-F238E27FC236}">
-                <a16:creationId xmlns:a16="http://schemas.microsoft.com/office/drawing/2014/main" id="{E9E6991E-191B-3B4A-8DB7-778D0FE5200F}"/>
-              </a:ext>
-            </a:extLst>
-          </p:cNvPr>
-          <p:cNvSpPr>
-            <a:spLocks noGrp="1"/>
-          </p:cNvSpPr>
-          <p:nvPr>
-            <p:ph type="body" idx="1"/>
-          </p:nvPr>
-        </p:nvSpPr>
-        <p:spPr>
-          <a:xfrm>
-            <a:off x="839788" y="1681163"/>
-            <a:ext cx="5157787" cy="823912"/>
+            <a:off x="609600" y="1535113"/>
+            <a:ext cx="5386917" cy="639762"/>
           </a:xfrm>
         </p:spPr>
         <p:txBody>
@@ -2553,13 +2788,7 @@
       </p:sp>
       <p:sp>
         <p:nvSpPr>
-          <p:cNvPr id="4" name="Content Placeholder 3">
-            <a:extLst>
-              <a:ext uri="{FF2B5EF4-FFF2-40B4-BE49-F238E27FC236}">
-                <a16:creationId xmlns:a16="http://schemas.microsoft.com/office/drawing/2014/main" id="{283B9E46-EDBF-9C5F-50EA-B5C71FE2BECC}"/>
-              </a:ext>
-            </a:extLst>
-          </p:cNvPr>
+          <p:cNvPr id="4" name="Content Placeholder 3"/>
           <p:cNvSpPr>
             <a:spLocks noGrp="1"/>
           </p:cNvSpPr>
@@ -2569,13 +2798,41 @@
         </p:nvSpPr>
         <p:spPr>
           <a:xfrm>
-            <a:off x="839788" y="2505075"/>
-            <a:ext cx="5157787" cy="3684588"/>
+            <a:off x="609600" y="2174875"/>
+            <a:ext cx="5386917" cy="3951288"/>
           </a:xfrm>
         </p:spPr>
         <p:txBody>
           <a:bodyPr/>
-          <a:lstStyle/>
+          <a:lstStyle>
+            <a:lvl1pPr>
+              <a:defRPr sz="2400"/>
+            </a:lvl1pPr>
+            <a:lvl2pPr>
+              <a:defRPr sz="2000"/>
+            </a:lvl2pPr>
+            <a:lvl3pPr>
+              <a:defRPr sz="1800"/>
+            </a:lvl3pPr>
+            <a:lvl4pPr>
+              <a:defRPr sz="1600"/>
+            </a:lvl4pPr>
+            <a:lvl5pPr>
+              <a:defRPr sz="1600"/>
+            </a:lvl5pPr>
+            <a:lvl6pPr>
+              <a:defRPr sz="1600"/>
+            </a:lvl6pPr>
+            <a:lvl7pPr>
+              <a:defRPr sz="1600"/>
+            </a:lvl7pPr>
+            <a:lvl8pPr>
+              <a:defRPr sz="1600"/>
+            </a:lvl8pPr>
+            <a:lvl9pPr>
+              <a:defRPr sz="1600"/>
+            </a:lvl9pPr>
+          </a:lstStyle>
           <a:p>
             <a:pPr lvl="0"/>
             <a:r>
@@ -2616,13 +2873,7 @@
       </p:sp>
       <p:sp>
         <p:nvSpPr>
-          <p:cNvPr id="5" name="Text Placeholder 4">
-            <a:extLst>
-              <a:ext uri="{FF2B5EF4-FFF2-40B4-BE49-F238E27FC236}">
-                <a16:creationId xmlns:a16="http://schemas.microsoft.com/office/drawing/2014/main" id="{F8DA6F08-2800-610C-D93A-406EF17E8DBE}"/>
-              </a:ext>
-            </a:extLst>
-          </p:cNvPr>
+          <p:cNvPr id="5" name="Text Placeholder 4"/>
           <p:cNvSpPr>
             <a:spLocks noGrp="1"/>
           </p:cNvSpPr>
@@ -2632,8 +2883,8 @@
         </p:nvSpPr>
         <p:spPr>
           <a:xfrm>
-            <a:off x="6172200" y="1681163"/>
-            <a:ext cx="5183188" cy="823912"/>
+            <a:off x="6193368" y="1535113"/>
+            <a:ext cx="5389033" cy="639762"/>
           </a:xfrm>
         </p:spPr>
         <p:txBody>
@@ -2687,13 +2938,7 @@
       </p:sp>
       <p:sp>
         <p:nvSpPr>
-          <p:cNvPr id="6" name="Content Placeholder 5">
-            <a:extLst>
-              <a:ext uri="{FF2B5EF4-FFF2-40B4-BE49-F238E27FC236}">
-                <a16:creationId xmlns:a16="http://schemas.microsoft.com/office/drawing/2014/main" id="{E347D325-0A10-9D0D-9C30-09CA594E90CE}"/>
-              </a:ext>
-            </a:extLst>
-          </p:cNvPr>
+          <p:cNvPr id="6" name="Content Placeholder 5"/>
           <p:cNvSpPr>
             <a:spLocks noGrp="1"/>
           </p:cNvSpPr>
@@ -2703,13 +2948,41 @@
         </p:nvSpPr>
         <p:spPr>
           <a:xfrm>
-            <a:off x="6172200" y="2505075"/>
-            <a:ext cx="5183188" cy="3684588"/>
+            <a:off x="6193368" y="2174875"/>
+            <a:ext cx="5389033" cy="3951288"/>
           </a:xfrm>
         </p:spPr>
         <p:txBody>
           <a:bodyPr/>
-          <a:lstStyle/>
+          <a:lstStyle>
+            <a:lvl1pPr>
+              <a:defRPr sz="2400"/>
+            </a:lvl1pPr>
+            <a:lvl2pPr>
+              <a:defRPr sz="2000"/>
+            </a:lvl2pPr>
+            <a:lvl3pPr>
+              <a:defRPr sz="1800"/>
+            </a:lvl3pPr>
+            <a:lvl4pPr>
+              <a:defRPr sz="1600"/>
+            </a:lvl4pPr>
+            <a:lvl5pPr>
+              <a:defRPr sz="1600"/>
+            </a:lvl5pPr>
+            <a:lvl6pPr>
+              <a:defRPr sz="1600"/>
+            </a:lvl6pPr>
+            <a:lvl7pPr>
+              <a:defRPr sz="1600"/>
+            </a:lvl7pPr>
+            <a:lvl8pPr>
+              <a:defRPr sz="1600"/>
+            </a:lvl8pPr>
+            <a:lvl9pPr>
+              <a:defRPr sz="1600"/>
+            </a:lvl9pPr>
+          </a:lstStyle>
           <a:p>
             <a:pPr lvl="0"/>
             <a:r>
@@ -2750,13 +3023,7 @@
       </p:sp>
       <p:sp>
         <p:nvSpPr>
-          <p:cNvPr id="7" name="Date Placeholder 6">
-            <a:extLst>
-              <a:ext uri="{FF2B5EF4-FFF2-40B4-BE49-F238E27FC236}">
-                <a16:creationId xmlns:a16="http://schemas.microsoft.com/office/drawing/2014/main" id="{4A9470AC-57E5-CE99-F22E-6CC0A504EB24}"/>
-              </a:ext>
-            </a:extLst>
-          </p:cNvPr>
+          <p:cNvPr id="7" name="Date Placeholder 6"/>
           <p:cNvSpPr>
             <a:spLocks noGrp="1"/>
           </p:cNvSpPr>
@@ -2772,7 +3039,7 @@
             <a:fld id="{1D8BD707-D9CF-40AE-B4C6-C98DA3205C09}" type="datetimeFigureOut">
               <a:rPr lang="en-US" smtClean="0"/>
               <a:pPr/>
-              <a:t>9/10/2025</a:t>
+              <a:t>9/14/25</a:t>
             </a:fld>
             <a:endParaRPr lang="en-US"/>
           </a:p>
@@ -2780,13 +3047,7 @@
       </p:sp>
       <p:sp>
         <p:nvSpPr>
-          <p:cNvPr id="8" name="Footer Placeholder 7">
-            <a:extLst>
-              <a:ext uri="{FF2B5EF4-FFF2-40B4-BE49-F238E27FC236}">
-                <a16:creationId xmlns:a16="http://schemas.microsoft.com/office/drawing/2014/main" id="{BE398542-B718-898A-6FA4-F23363737F6F}"/>
-              </a:ext>
-            </a:extLst>
-          </p:cNvPr>
+          <p:cNvPr id="8" name="Footer Placeholder 7"/>
           <p:cNvSpPr>
             <a:spLocks noGrp="1"/>
           </p:cNvSpPr>
@@ -2805,13 +3066,7 @@
       </p:sp>
       <p:sp>
         <p:nvSpPr>
-          <p:cNvPr id="9" name="Slide Number Placeholder 8">
-            <a:extLst>
-              <a:ext uri="{FF2B5EF4-FFF2-40B4-BE49-F238E27FC236}">
-                <a16:creationId xmlns:a16="http://schemas.microsoft.com/office/drawing/2014/main" id="{0EAD29AD-3C35-13CC-9C76-E1A13568C7FA}"/>
-              </a:ext>
-            </a:extLst>
-          </p:cNvPr>
+          <p:cNvPr id="9" name="Slide Number Placeholder 8"/>
           <p:cNvSpPr>
             <a:spLocks noGrp="1"/>
           </p:cNvSpPr>
@@ -2835,10 +3090,45 @@
       </p:sp>
       <p:cxnSp>
         <p:nvCxnSpPr>
-          <p:cNvPr id="10" name="Straight Connector 9">
+          <p:cNvPr id="10" name="Straight Connector 9"/>
+          <p:cNvCxnSpPr/>
+          <p:nvPr/>
+        </p:nvCxnSpPr>
+        <p:spPr>
+          <a:xfrm>
+            <a:off x="609600" y="1447800"/>
+            <a:ext cx="11074400" cy="0"/>
+          </a:xfrm>
+          <a:prstGeom prst="line">
+            <a:avLst/>
+          </a:prstGeom>
+          <a:ln w="12700">
+            <a:solidFill>
+              <a:schemeClr val="tx1"/>
+            </a:solidFill>
+          </a:ln>
+        </p:spPr>
+        <p:style>
+          <a:lnRef idx="1">
+            <a:schemeClr val="accent1"/>
+          </a:lnRef>
+          <a:fillRef idx="0">
+            <a:schemeClr val="accent1"/>
+          </a:fillRef>
+          <a:effectRef idx="0">
+            <a:schemeClr val="accent1"/>
+          </a:effectRef>
+          <a:fontRef idx="minor">
+            <a:schemeClr val="tx1"/>
+          </a:fontRef>
+        </p:style>
+      </p:cxnSp>
+      <p:cxnSp>
+        <p:nvCxnSpPr>
+          <p:cNvPr id="11" name="Straight Connector 10">
             <a:extLst>
               <a:ext uri="{FF2B5EF4-FFF2-40B4-BE49-F238E27FC236}">
-                <a16:creationId xmlns:a16="http://schemas.microsoft.com/office/drawing/2014/main" id="{14001007-37BD-1DBD-073F-B13D450E2CB8}"/>
+                <a16:creationId xmlns:a16="http://schemas.microsoft.com/office/drawing/2014/main" id="{F3436290-11E2-F20B-966B-F18296CC48D7}"/>
               </a:ext>
             </a:extLst>
           </p:cNvPr>
@@ -2877,7 +3167,7 @@
     </p:spTree>
     <p:extLst>
       <p:ext uri="{BB962C8B-B14F-4D97-AF65-F5344CB8AC3E}">
-        <p14:creationId xmlns:p14="http://schemas.microsoft.com/office/powerpoint/2010/main" val="2340744014"/>
+        <p14:creationId xmlns:p14="http://schemas.microsoft.com/office/powerpoint/2010/main" val="819817472"/>
       </p:ext>
     </p:extLst>
   </p:cSld>
@@ -2906,13 +3196,7 @@
       </p:grpSpPr>
       <p:sp>
         <p:nvSpPr>
-          <p:cNvPr id="2" name="Title 1">
-            <a:extLst>
-              <a:ext uri="{FF2B5EF4-FFF2-40B4-BE49-F238E27FC236}">
-                <a16:creationId xmlns:a16="http://schemas.microsoft.com/office/drawing/2014/main" id="{4FBCE742-7917-1239-1255-02737E729370}"/>
-              </a:ext>
-            </a:extLst>
-          </p:cNvPr>
+          <p:cNvPr id="2" name="Title 1"/>
           <p:cNvSpPr>
             <a:spLocks noGrp="1"/>
           </p:cNvSpPr>
@@ -2923,25 +3207,30 @@
         <p:spPr/>
         <p:txBody>
           <a:bodyPr/>
-          <a:lstStyle/>
+          <a:lstStyle>
+            <a:lvl1pPr algn="l">
+              <a:defRPr>
+                <a:solidFill>
+                  <a:schemeClr val="tx1">
+                    <a:lumMod val="65000"/>
+                    <a:lumOff val="35000"/>
+                  </a:schemeClr>
+                </a:solidFill>
+              </a:defRPr>
+            </a:lvl1pPr>
+          </a:lstStyle>
           <a:p>
             <a:r>
               <a:rPr lang="en-GB"/>
               <a:t>Click to edit Master title style</a:t>
             </a:r>
-            <a:endParaRPr lang="en-US"/>
-          </a:p>
-        </p:txBody>
-      </p:sp>
-      <p:sp>
-        <p:nvSpPr>
-          <p:cNvPr id="3" name="Date Placeholder 2">
-            <a:extLst>
-              <a:ext uri="{FF2B5EF4-FFF2-40B4-BE49-F238E27FC236}">
-                <a16:creationId xmlns:a16="http://schemas.microsoft.com/office/drawing/2014/main" id="{FBDE433E-D4DF-9BD1-7E51-8BF4A45BE57F}"/>
-              </a:ext>
-            </a:extLst>
-          </p:cNvPr>
+            <a:endParaRPr lang="en-US" dirty="0"/>
+          </a:p>
+        </p:txBody>
+      </p:sp>
+      <p:sp>
+        <p:nvSpPr>
+          <p:cNvPr id="3" name="Date Placeholder 2"/>
           <p:cNvSpPr>
             <a:spLocks noGrp="1"/>
           </p:cNvSpPr>
@@ -2957,7 +3246,7 @@
             <a:fld id="{1D8BD707-D9CF-40AE-B4C6-C98DA3205C09}" type="datetimeFigureOut">
               <a:rPr lang="en-US" smtClean="0"/>
               <a:pPr/>
-              <a:t>9/10/2025</a:t>
+              <a:t>9/14/25</a:t>
             </a:fld>
             <a:endParaRPr lang="en-US"/>
           </a:p>
@@ -2965,13 +3254,7 @@
       </p:sp>
       <p:sp>
         <p:nvSpPr>
-          <p:cNvPr id="4" name="Footer Placeholder 3">
-            <a:extLst>
-              <a:ext uri="{FF2B5EF4-FFF2-40B4-BE49-F238E27FC236}">
-                <a16:creationId xmlns:a16="http://schemas.microsoft.com/office/drawing/2014/main" id="{7EFA139A-6F2C-1874-845A-431D0AA3B164}"/>
-              </a:ext>
-            </a:extLst>
-          </p:cNvPr>
+          <p:cNvPr id="4" name="Footer Placeholder 3"/>
           <p:cNvSpPr>
             <a:spLocks noGrp="1"/>
           </p:cNvSpPr>
@@ -2990,13 +3273,7 @@
       </p:sp>
       <p:sp>
         <p:nvSpPr>
-          <p:cNvPr id="5" name="Slide Number Placeholder 4">
-            <a:extLst>
-              <a:ext uri="{FF2B5EF4-FFF2-40B4-BE49-F238E27FC236}">
-                <a16:creationId xmlns:a16="http://schemas.microsoft.com/office/drawing/2014/main" id="{90FD240A-7F51-AF07-D51B-EA6B14CFFAB6}"/>
-              </a:ext>
-            </a:extLst>
-          </p:cNvPr>
+          <p:cNvPr id="5" name="Slide Number Placeholder 4"/>
           <p:cNvSpPr>
             <a:spLocks noGrp="1"/>
           </p:cNvSpPr>
@@ -3020,10 +3297,86 @@
       </p:sp>
       <p:cxnSp>
         <p:nvCxnSpPr>
-          <p:cNvPr id="6" name="Straight Connector 5">
+          <p:cNvPr id="6" name="Straight Connector 5"/>
+          <p:cNvCxnSpPr/>
+          <p:nvPr/>
+        </p:nvCxnSpPr>
+        <p:spPr>
+          <a:xfrm>
+            <a:off x="609600" y="1447800"/>
+            <a:ext cx="11074400" cy="0"/>
+          </a:xfrm>
+          <a:prstGeom prst="line">
+            <a:avLst/>
+          </a:prstGeom>
+          <a:ln w="12700">
+            <a:solidFill>
+              <a:schemeClr val="tx1"/>
+            </a:solidFill>
+          </a:ln>
+        </p:spPr>
+        <p:style>
+          <a:lnRef idx="1">
+            <a:schemeClr val="accent1"/>
+          </a:lnRef>
+          <a:fillRef idx="0">
+            <a:schemeClr val="accent1"/>
+          </a:fillRef>
+          <a:effectRef idx="0">
+            <a:schemeClr val="accent1"/>
+          </a:effectRef>
+          <a:fontRef idx="minor">
+            <a:schemeClr val="tx1"/>
+          </a:fontRef>
+        </p:style>
+      </p:cxnSp>
+      <p:cxnSp>
+        <p:nvCxnSpPr>
+          <p:cNvPr id="7" name="Straight Connector 6">
             <a:extLst>
               <a:ext uri="{FF2B5EF4-FFF2-40B4-BE49-F238E27FC236}">
-                <a16:creationId xmlns:a16="http://schemas.microsoft.com/office/drawing/2014/main" id="{A2F66563-289F-42F2-BE0A-E2379A2D8EF3}"/>
+                <a16:creationId xmlns:a16="http://schemas.microsoft.com/office/drawing/2014/main" id="{BDB4946F-2A50-46DF-D246-8E463A5B9E4E}"/>
+              </a:ext>
+            </a:extLst>
+          </p:cNvPr>
+          <p:cNvCxnSpPr/>
+          <p:nvPr/>
+        </p:nvCxnSpPr>
+        <p:spPr>
+          <a:xfrm>
+            <a:off x="609600" y="1447800"/>
+            <a:ext cx="11074400" cy="0"/>
+          </a:xfrm>
+          <a:prstGeom prst="line">
+            <a:avLst/>
+          </a:prstGeom>
+          <a:ln w="12700">
+            <a:solidFill>
+              <a:schemeClr val="tx1"/>
+            </a:solidFill>
+          </a:ln>
+        </p:spPr>
+        <p:style>
+          <a:lnRef idx="1">
+            <a:schemeClr val="accent1"/>
+          </a:lnRef>
+          <a:fillRef idx="0">
+            <a:schemeClr val="accent1"/>
+          </a:fillRef>
+          <a:effectRef idx="0">
+            <a:schemeClr val="accent1"/>
+          </a:effectRef>
+          <a:fontRef idx="minor">
+            <a:schemeClr val="tx1"/>
+          </a:fontRef>
+        </p:style>
+      </p:cxnSp>
+      <p:cxnSp>
+        <p:nvCxnSpPr>
+          <p:cNvPr id="8" name="Straight Connector 7">
+            <a:extLst>
+              <a:ext uri="{FF2B5EF4-FFF2-40B4-BE49-F238E27FC236}">
+                <a16:creationId xmlns:a16="http://schemas.microsoft.com/office/drawing/2014/main" id="{CCF61A43-37C0-D158-13BE-1753663F3BEC}"/>
               </a:ext>
             </a:extLst>
           </p:cNvPr>
@@ -3062,7 +3415,7 @@
     </p:spTree>
     <p:extLst>
       <p:ext uri="{BB962C8B-B14F-4D97-AF65-F5344CB8AC3E}">
-        <p14:creationId xmlns:p14="http://schemas.microsoft.com/office/powerpoint/2010/main" val="2465385547"/>
+        <p14:creationId xmlns:p14="http://schemas.microsoft.com/office/powerpoint/2010/main" val="546397979"/>
       </p:ext>
     </p:extLst>
   </p:cSld>
@@ -3091,13 +3444,7 @@
       </p:grpSpPr>
       <p:sp>
         <p:nvSpPr>
-          <p:cNvPr id="2" name="Date Placeholder 1">
-            <a:extLst>
-              <a:ext uri="{FF2B5EF4-FFF2-40B4-BE49-F238E27FC236}">
-                <a16:creationId xmlns:a16="http://schemas.microsoft.com/office/drawing/2014/main" id="{4C65892D-EC0B-2963-97E7-484BEF12F600}"/>
-              </a:ext>
-            </a:extLst>
-          </p:cNvPr>
+          <p:cNvPr id="2" name="Date Placeholder 1"/>
           <p:cNvSpPr>
             <a:spLocks noGrp="1"/>
           </p:cNvSpPr>
@@ -3113,7 +3460,7 @@
             <a:fld id="{1D8BD707-D9CF-40AE-B4C6-C98DA3205C09}" type="datetimeFigureOut">
               <a:rPr lang="en-US" smtClean="0"/>
               <a:pPr/>
-              <a:t>9/10/2025</a:t>
+              <a:t>9/14/25</a:t>
             </a:fld>
             <a:endParaRPr lang="en-US"/>
           </a:p>
@@ -3121,13 +3468,7 @@
       </p:sp>
       <p:sp>
         <p:nvSpPr>
-          <p:cNvPr id="3" name="Footer Placeholder 2">
-            <a:extLst>
-              <a:ext uri="{FF2B5EF4-FFF2-40B4-BE49-F238E27FC236}">
-                <a16:creationId xmlns:a16="http://schemas.microsoft.com/office/drawing/2014/main" id="{135E5B56-62FF-5711-B4DD-CB23D6E2C22C}"/>
-              </a:ext>
-            </a:extLst>
-          </p:cNvPr>
+          <p:cNvPr id="3" name="Footer Placeholder 2"/>
           <p:cNvSpPr>
             <a:spLocks noGrp="1"/>
           </p:cNvSpPr>
@@ -3146,13 +3487,7 @@
       </p:sp>
       <p:sp>
         <p:nvSpPr>
-          <p:cNvPr id="4" name="Slide Number Placeholder 3">
-            <a:extLst>
-              <a:ext uri="{FF2B5EF4-FFF2-40B4-BE49-F238E27FC236}">
-                <a16:creationId xmlns:a16="http://schemas.microsoft.com/office/drawing/2014/main" id="{5EA3816A-6B4E-27F4-09CD-50323D562B4C}"/>
-              </a:ext>
-            </a:extLst>
-          </p:cNvPr>
+          <p:cNvPr id="4" name="Slide Number Placeholder 3"/>
           <p:cNvSpPr>
             <a:spLocks noGrp="1"/>
           </p:cNvSpPr>
@@ -3177,7 +3512,7 @@
     </p:spTree>
     <p:extLst>
       <p:ext uri="{BB962C8B-B14F-4D97-AF65-F5344CB8AC3E}">
-        <p14:creationId xmlns:p14="http://schemas.microsoft.com/office/powerpoint/2010/main" val="3459592720"/>
+        <p14:creationId xmlns:p14="http://schemas.microsoft.com/office/powerpoint/2010/main" val="1919852073"/>
       </p:ext>
     </p:extLst>
   </p:cSld>
@@ -3206,13 +3541,7 @@
       </p:grpSpPr>
       <p:sp>
         <p:nvSpPr>
-          <p:cNvPr id="2" name="Title 1">
-            <a:extLst>
-              <a:ext uri="{FF2B5EF4-FFF2-40B4-BE49-F238E27FC236}">
-                <a16:creationId xmlns:a16="http://schemas.microsoft.com/office/drawing/2014/main" id="{F005F99A-14EA-8A0E-C240-6CD25422CCC4}"/>
-              </a:ext>
-            </a:extLst>
-          </p:cNvPr>
+          <p:cNvPr id="2" name="Title 1"/>
           <p:cNvSpPr>
             <a:spLocks noGrp="1"/>
           </p:cNvSpPr>
@@ -3222,15 +3551,15 @@
         </p:nvSpPr>
         <p:spPr>
           <a:xfrm>
-            <a:off x="839788" y="457200"/>
-            <a:ext cx="3932237" cy="1600200"/>
+            <a:off x="609601" y="273050"/>
+            <a:ext cx="4011084" cy="1162050"/>
           </a:xfrm>
         </p:spPr>
         <p:txBody>
           <a:bodyPr anchor="b"/>
           <a:lstStyle>
-            <a:lvl1pPr>
-              <a:defRPr sz="3200"/>
+            <a:lvl1pPr algn="l">
+              <a:defRPr sz="2000" b="1"/>
             </a:lvl1pPr>
           </a:lstStyle>
           <a:p>
@@ -3244,13 +3573,7 @@
       </p:sp>
       <p:sp>
         <p:nvSpPr>
-          <p:cNvPr id="3" name="Content Placeholder 2">
-            <a:extLst>
-              <a:ext uri="{FF2B5EF4-FFF2-40B4-BE49-F238E27FC236}">
-                <a16:creationId xmlns:a16="http://schemas.microsoft.com/office/drawing/2014/main" id="{87AF863A-2716-D3C8-B749-A14D03205604}"/>
-              </a:ext>
-            </a:extLst>
-          </p:cNvPr>
+          <p:cNvPr id="3" name="Content Placeholder 2"/>
           <p:cNvSpPr>
             <a:spLocks noGrp="1"/>
           </p:cNvSpPr>
@@ -3260,8 +3583,8 @@
         </p:nvSpPr>
         <p:spPr>
           <a:xfrm>
-            <a:off x="5183188" y="987425"/>
-            <a:ext cx="6172200" cy="4873625"/>
+            <a:off x="4766733" y="273051"/>
+            <a:ext cx="6815667" cy="5853113"/>
           </a:xfrm>
         </p:spPr>
         <p:txBody>
@@ -3335,13 +3658,7 @@
       </p:sp>
       <p:sp>
         <p:nvSpPr>
-          <p:cNvPr id="4" name="Text Placeholder 3">
-            <a:extLst>
-              <a:ext uri="{FF2B5EF4-FFF2-40B4-BE49-F238E27FC236}">
-                <a16:creationId xmlns:a16="http://schemas.microsoft.com/office/drawing/2014/main" id="{A67DA301-88E4-EAF2-0B10-A714E0EBE92A}"/>
-              </a:ext>
-            </a:extLst>
-          </p:cNvPr>
+          <p:cNvPr id="4" name="Text Placeholder 3"/>
           <p:cNvSpPr>
             <a:spLocks noGrp="1"/>
           </p:cNvSpPr>
@@ -3351,8 +3668,8 @@
         </p:nvSpPr>
         <p:spPr>
           <a:xfrm>
-            <a:off x="839788" y="2057400"/>
-            <a:ext cx="3932237" cy="3811588"/>
+            <a:off x="609601" y="1435101"/>
+            <a:ext cx="4011084" cy="4691063"/>
           </a:xfrm>
         </p:spPr>
         <p:txBody>
@@ -3360,39 +3677,39 @@
           <a:lstStyle>
             <a:lvl1pPr marL="0" indent="0">
               <a:buNone/>
-              <a:defRPr sz="1600"/>
+              <a:defRPr sz="1400"/>
             </a:lvl1pPr>
             <a:lvl2pPr marL="457200" indent="0">
               <a:buNone/>
-              <a:defRPr sz="1400"/>
+              <a:defRPr sz="1200"/>
             </a:lvl2pPr>
             <a:lvl3pPr marL="914400" indent="0">
               <a:buNone/>
-              <a:defRPr sz="1200"/>
+              <a:defRPr sz="1000"/>
             </a:lvl3pPr>
             <a:lvl4pPr marL="1371600" indent="0">
               <a:buNone/>
-              <a:defRPr sz="1000"/>
+              <a:defRPr sz="900"/>
             </a:lvl4pPr>
             <a:lvl5pPr marL="1828800" indent="0">
               <a:buNone/>
-              <a:defRPr sz="1000"/>
+              <a:defRPr sz="900"/>
             </a:lvl5pPr>
             <a:lvl6pPr marL="2286000" indent="0">
               <a:buNone/>
-              <a:defRPr sz="1000"/>
+              <a:defRPr sz="900"/>
             </a:lvl6pPr>
             <a:lvl7pPr marL="2743200" indent="0">
               <a:buNone/>
-              <a:defRPr sz="1000"/>
+              <a:defRPr sz="900"/>
             </a:lvl7pPr>
             <a:lvl8pPr marL="3200400" indent="0">
               <a:buNone/>
-              <a:defRPr sz="1000"/>
+              <a:defRPr sz="900"/>
             </a:lvl8pPr>
             <a:lvl9pPr marL="3657600" indent="0">
               <a:buNone/>
-              <a:defRPr sz="1000"/>
+              <a:defRPr sz="900"/>
             </a:lvl9pPr>
           </a:lstStyle>
           <a:p>
@@ -3406,13 +3723,7 @@
       </p:sp>
       <p:sp>
         <p:nvSpPr>
-          <p:cNvPr id="5" name="Date Placeholder 4">
-            <a:extLst>
-              <a:ext uri="{FF2B5EF4-FFF2-40B4-BE49-F238E27FC236}">
-                <a16:creationId xmlns:a16="http://schemas.microsoft.com/office/drawing/2014/main" id="{E2A3ACBC-93EF-F19B-0865-08796F608CE7}"/>
-              </a:ext>
-            </a:extLst>
-          </p:cNvPr>
+          <p:cNvPr id="5" name="Date Placeholder 4"/>
           <p:cNvSpPr>
             <a:spLocks noGrp="1"/>
           </p:cNvSpPr>
@@ -3428,7 +3739,7 @@
             <a:fld id="{1D8BD707-D9CF-40AE-B4C6-C98DA3205C09}" type="datetimeFigureOut">
               <a:rPr lang="en-US" smtClean="0"/>
               <a:pPr/>
-              <a:t>9/10/2025</a:t>
+              <a:t>9/14/25</a:t>
             </a:fld>
             <a:endParaRPr lang="en-US"/>
           </a:p>
@@ -3436,13 +3747,7 @@
       </p:sp>
       <p:sp>
         <p:nvSpPr>
-          <p:cNvPr id="6" name="Footer Placeholder 5">
-            <a:extLst>
-              <a:ext uri="{FF2B5EF4-FFF2-40B4-BE49-F238E27FC236}">
-                <a16:creationId xmlns:a16="http://schemas.microsoft.com/office/drawing/2014/main" id="{D66BA186-AEA1-BC56-CCD5-B66D527780B9}"/>
-              </a:ext>
-            </a:extLst>
-          </p:cNvPr>
+          <p:cNvPr id="6" name="Footer Placeholder 5"/>
           <p:cNvSpPr>
             <a:spLocks noGrp="1"/>
           </p:cNvSpPr>
@@ -3461,13 +3766,7 @@
       </p:sp>
       <p:sp>
         <p:nvSpPr>
-          <p:cNvPr id="7" name="Slide Number Placeholder 6">
-            <a:extLst>
-              <a:ext uri="{FF2B5EF4-FFF2-40B4-BE49-F238E27FC236}">
-                <a16:creationId xmlns:a16="http://schemas.microsoft.com/office/drawing/2014/main" id="{837F768C-0B08-224E-AEDB-DA3EA2FCB3B4}"/>
-              </a:ext>
-            </a:extLst>
-          </p:cNvPr>
+          <p:cNvPr id="7" name="Slide Number Placeholder 6"/>
           <p:cNvSpPr>
             <a:spLocks noGrp="1"/>
           </p:cNvSpPr>
@@ -3492,7 +3791,7 @@
     </p:spTree>
     <p:extLst>
       <p:ext uri="{BB962C8B-B14F-4D97-AF65-F5344CB8AC3E}">
-        <p14:creationId xmlns:p14="http://schemas.microsoft.com/office/powerpoint/2010/main" val="2102502518"/>
+        <p14:creationId xmlns:p14="http://schemas.microsoft.com/office/powerpoint/2010/main" val="4033810808"/>
       </p:ext>
     </p:extLst>
   </p:cSld>
@@ -3521,13 +3820,7 @@
       </p:grpSpPr>
       <p:sp>
         <p:nvSpPr>
-          <p:cNvPr id="2" name="Title 1">
-            <a:extLst>
-              <a:ext uri="{FF2B5EF4-FFF2-40B4-BE49-F238E27FC236}">
-                <a16:creationId xmlns:a16="http://schemas.microsoft.com/office/drawing/2014/main" id="{12E2C1E8-44F3-D8AB-91C4-4FBABF59E640}"/>
-              </a:ext>
-            </a:extLst>
-          </p:cNvPr>
+          <p:cNvPr id="2" name="Title 1"/>
           <p:cNvSpPr>
             <a:spLocks noGrp="1"/>
           </p:cNvSpPr>
@@ -3537,15 +3830,15 @@
         </p:nvSpPr>
         <p:spPr>
           <a:xfrm>
-            <a:off x="839788" y="457200"/>
-            <a:ext cx="3932237" cy="1600200"/>
+            <a:off x="2389717" y="4800600"/>
+            <a:ext cx="7315200" cy="566738"/>
           </a:xfrm>
         </p:spPr>
         <p:txBody>
           <a:bodyPr anchor="b"/>
           <a:lstStyle>
-            <a:lvl1pPr>
-              <a:defRPr sz="3200"/>
+            <a:lvl1pPr algn="l">
+              <a:defRPr sz="2000" b="1"/>
             </a:lvl1pPr>
           </a:lstStyle>
           <a:p>
@@ -3559,13 +3852,7 @@
       </p:sp>
       <p:sp>
         <p:nvSpPr>
-          <p:cNvPr id="3" name="Picture Placeholder 2">
-            <a:extLst>
-              <a:ext uri="{FF2B5EF4-FFF2-40B4-BE49-F238E27FC236}">
-                <a16:creationId xmlns:a16="http://schemas.microsoft.com/office/drawing/2014/main" id="{91894175-160E-1874-56CC-15AEC0C51228}"/>
-              </a:ext>
-            </a:extLst>
-          </p:cNvPr>
+          <p:cNvPr id="3" name="Picture Placeholder 2"/>
           <p:cNvSpPr>
             <a:spLocks noGrp="1"/>
           </p:cNvSpPr>
@@ -3575,8 +3862,8 @@
         </p:nvSpPr>
         <p:spPr>
           <a:xfrm>
-            <a:off x="5183188" y="987425"/>
-            <a:ext cx="6172200" cy="4873625"/>
+            <a:off x="2389717" y="612775"/>
+            <a:ext cx="7315200" cy="4114800"/>
           </a:xfrm>
         </p:spPr>
         <p:txBody>
@@ -3620,19 +3907,17 @@
             </a:lvl9pPr>
           </a:lstStyle>
           <a:p>
+            <a:r>
+              <a:rPr lang="en-GB"/>
+              <a:t>Click icon to add picture</a:t>
+            </a:r>
             <a:endParaRPr lang="en-US"/>
           </a:p>
         </p:txBody>
       </p:sp>
       <p:sp>
         <p:nvSpPr>
-          <p:cNvPr id="4" name="Text Placeholder 3">
-            <a:extLst>
-              <a:ext uri="{FF2B5EF4-FFF2-40B4-BE49-F238E27FC236}">
-                <a16:creationId xmlns:a16="http://schemas.microsoft.com/office/drawing/2014/main" id="{3D288864-788B-7024-00AE-4DF25E05E329}"/>
-              </a:ext>
-            </a:extLst>
-          </p:cNvPr>
+          <p:cNvPr id="4" name="Text Placeholder 3"/>
           <p:cNvSpPr>
             <a:spLocks noGrp="1"/>
           </p:cNvSpPr>
@@ -3642,8 +3927,8 @@
         </p:nvSpPr>
         <p:spPr>
           <a:xfrm>
-            <a:off x="839788" y="2057400"/>
-            <a:ext cx="3932237" cy="3811588"/>
+            <a:off x="2389717" y="5367338"/>
+            <a:ext cx="7315200" cy="804862"/>
           </a:xfrm>
         </p:spPr>
         <p:txBody>
@@ -3651,39 +3936,39 @@
           <a:lstStyle>
             <a:lvl1pPr marL="0" indent="0">
               <a:buNone/>
-              <a:defRPr sz="1600"/>
+              <a:defRPr sz="1400"/>
             </a:lvl1pPr>
             <a:lvl2pPr marL="457200" indent="0">
               <a:buNone/>
-              <a:defRPr sz="1400"/>
+              <a:defRPr sz="1200"/>
             </a:lvl2pPr>
             <a:lvl3pPr marL="914400" indent="0">
               <a:buNone/>
-              <a:defRPr sz="1200"/>
+              <a:defRPr sz="1000"/>
             </a:lvl3pPr>
             <a:lvl4pPr marL="1371600" indent="0">
               <a:buNone/>
-              <a:defRPr sz="1000"/>
+              <a:defRPr sz="900"/>
             </a:lvl4pPr>
             <a:lvl5pPr marL="1828800" indent="0">
               <a:buNone/>
-              <a:defRPr sz="1000"/>
+              <a:defRPr sz="900"/>
             </a:lvl5pPr>
             <a:lvl6pPr marL="2286000" indent="0">
               <a:buNone/>
-              <a:defRPr sz="1000"/>
+              <a:defRPr sz="900"/>
             </a:lvl6pPr>
             <a:lvl7pPr marL="2743200" indent="0">
               <a:buNone/>
-              <a:defRPr sz="1000"/>
+              <a:defRPr sz="900"/>
             </a:lvl7pPr>
             <a:lvl8pPr marL="3200400" indent="0">
               <a:buNone/>
-              <a:defRPr sz="1000"/>
+              <a:defRPr sz="900"/>
             </a:lvl8pPr>
             <a:lvl9pPr marL="3657600" indent="0">
               <a:buNone/>
-              <a:defRPr sz="1000"/>
+              <a:defRPr sz="900"/>
             </a:lvl9pPr>
           </a:lstStyle>
           <a:p>
@@ -3697,13 +3982,7 @@
       </p:sp>
       <p:sp>
         <p:nvSpPr>
-          <p:cNvPr id="5" name="Date Placeholder 4">
-            <a:extLst>
-              <a:ext uri="{FF2B5EF4-FFF2-40B4-BE49-F238E27FC236}">
-                <a16:creationId xmlns:a16="http://schemas.microsoft.com/office/drawing/2014/main" id="{6C84B6E8-5245-4BFB-82B9-36187DA53F0E}"/>
-              </a:ext>
-            </a:extLst>
-          </p:cNvPr>
+          <p:cNvPr id="5" name="Date Placeholder 4"/>
           <p:cNvSpPr>
             <a:spLocks noGrp="1"/>
           </p:cNvSpPr>
@@ -3719,7 +3998,7 @@
             <a:fld id="{1D8BD707-D9CF-40AE-B4C6-C98DA3205C09}" type="datetimeFigureOut">
               <a:rPr lang="en-US" smtClean="0"/>
               <a:pPr/>
-              <a:t>9/10/2025</a:t>
+              <a:t>9/14/25</a:t>
             </a:fld>
             <a:endParaRPr lang="en-US"/>
           </a:p>
@@ -3727,13 +4006,7 @@
       </p:sp>
       <p:sp>
         <p:nvSpPr>
-          <p:cNvPr id="6" name="Footer Placeholder 5">
-            <a:extLst>
-              <a:ext uri="{FF2B5EF4-FFF2-40B4-BE49-F238E27FC236}">
-                <a16:creationId xmlns:a16="http://schemas.microsoft.com/office/drawing/2014/main" id="{F17A6ACC-8931-7AAB-4B75-7D7F505FC557}"/>
-              </a:ext>
-            </a:extLst>
-          </p:cNvPr>
+          <p:cNvPr id="6" name="Footer Placeholder 5"/>
           <p:cNvSpPr>
             <a:spLocks noGrp="1"/>
           </p:cNvSpPr>
@@ -3752,13 +4025,7 @@
       </p:sp>
       <p:sp>
         <p:nvSpPr>
-          <p:cNvPr id="7" name="Slide Number Placeholder 6">
-            <a:extLst>
-              <a:ext uri="{FF2B5EF4-FFF2-40B4-BE49-F238E27FC236}">
-                <a16:creationId xmlns:a16="http://schemas.microsoft.com/office/drawing/2014/main" id="{4A624FFB-33B6-C0CD-FFEC-F30DF099EF54}"/>
-              </a:ext>
-            </a:extLst>
-          </p:cNvPr>
+          <p:cNvPr id="7" name="Slide Number Placeholder 6"/>
           <p:cNvSpPr>
             <a:spLocks noGrp="1"/>
           </p:cNvSpPr>
@@ -3783,7 +4050,7 @@
     </p:spTree>
     <p:extLst>
       <p:ext uri="{BB962C8B-B14F-4D97-AF65-F5344CB8AC3E}">
-        <p14:creationId xmlns:p14="http://schemas.microsoft.com/office/powerpoint/2010/main" val="2716319497"/>
+        <p14:creationId xmlns:p14="http://schemas.microsoft.com/office/powerpoint/2010/main" val="3680579103"/>
       </p:ext>
     </p:extLst>
   </p:cSld>
@@ -3797,9 +4064,14 @@
 <p:sldMaster xmlns:a="http://schemas.openxmlformats.org/drawingml/2006/main" xmlns:r="http://schemas.openxmlformats.org/officeDocument/2006/relationships" xmlns:p="http://schemas.openxmlformats.org/presentationml/2006/main">
   <p:cSld>
     <p:bg>
-      <p:bgRef idx="1001">
-        <a:schemeClr val="bg1"/>
-      </p:bgRef>
+      <p:bgPr>
+        <a:solidFill>
+          <a:schemeClr val="bg1">
+            <a:lumMod val="85000"/>
+          </a:schemeClr>
+        </a:solidFill>
+        <a:effectLst/>
+      </p:bgPr>
     </p:bg>
     <p:spTree>
       <p:nvGrpSpPr>
@@ -3817,13 +4089,7 @@
       </p:grpSpPr>
       <p:sp>
         <p:nvSpPr>
-          <p:cNvPr id="2" name="Title Placeholder 1">
-            <a:extLst>
-              <a:ext uri="{FF2B5EF4-FFF2-40B4-BE49-F238E27FC236}">
-                <a16:creationId xmlns:a16="http://schemas.microsoft.com/office/drawing/2014/main" id="{F385AF3B-23D9-9BDE-25EB-04665B85DB21}"/>
-              </a:ext>
-            </a:extLst>
-          </p:cNvPr>
+          <p:cNvPr id="2" name="Title Placeholder 1"/>
           <p:cNvSpPr>
             <a:spLocks noGrp="1"/>
           </p:cNvSpPr>
@@ -3833,8 +4099,8 @@
         </p:nvSpPr>
         <p:spPr>
           <a:xfrm>
-            <a:off x="838200" y="365125"/>
-            <a:ext cx="10515600" cy="1325563"/>
+            <a:off x="609600" y="274638"/>
+            <a:ext cx="10972800" cy="1143000"/>
           </a:xfrm>
           <a:prstGeom prst="rect">
             <a:avLst/>
@@ -3856,13 +4122,7 @@
       </p:sp>
       <p:sp>
         <p:nvSpPr>
-          <p:cNvPr id="3" name="Text Placeholder 2">
-            <a:extLst>
-              <a:ext uri="{FF2B5EF4-FFF2-40B4-BE49-F238E27FC236}">
-                <a16:creationId xmlns:a16="http://schemas.microsoft.com/office/drawing/2014/main" id="{C098B9B3-098C-A949-EF14-B894393E9A74}"/>
-              </a:ext>
-            </a:extLst>
-          </p:cNvPr>
+          <p:cNvPr id="3" name="Text Placeholder 2"/>
           <p:cNvSpPr>
             <a:spLocks noGrp="1"/>
           </p:cNvSpPr>
@@ -3872,8 +4132,8 @@
         </p:nvSpPr>
         <p:spPr>
           <a:xfrm>
-            <a:off x="838200" y="1825625"/>
-            <a:ext cx="10515600" cy="4351338"/>
+            <a:off x="609600" y="1600201"/>
+            <a:ext cx="10972800" cy="4525963"/>
           </a:xfrm>
           <a:prstGeom prst="rect">
             <a:avLst/>
@@ -3924,13 +4184,7 @@
       </p:sp>
       <p:sp>
         <p:nvSpPr>
-          <p:cNvPr id="4" name="Date Placeholder 3">
-            <a:extLst>
-              <a:ext uri="{FF2B5EF4-FFF2-40B4-BE49-F238E27FC236}">
-                <a16:creationId xmlns:a16="http://schemas.microsoft.com/office/drawing/2014/main" id="{7524A744-508A-462E-1E61-1BB6F4CB3D14}"/>
-              </a:ext>
-            </a:extLst>
-          </p:cNvPr>
+          <p:cNvPr id="4" name="Date Placeholder 3"/>
           <p:cNvSpPr>
             <a:spLocks noGrp="1"/>
           </p:cNvSpPr>
@@ -3940,8 +4194,8 @@
         </p:nvSpPr>
         <p:spPr>
           <a:xfrm>
-            <a:off x="838200" y="6356350"/>
-            <a:ext cx="2743200" cy="365125"/>
+            <a:off x="609600" y="6356351"/>
+            <a:ext cx="2844800" cy="365125"/>
           </a:xfrm>
           <a:prstGeom prst="rect">
             <a:avLst/>
@@ -3964,7 +4218,7 @@
             <a:fld id="{1D8BD707-D9CF-40AE-B4C6-C98DA3205C09}" type="datetimeFigureOut">
               <a:rPr lang="en-US" smtClean="0"/>
               <a:pPr/>
-              <a:t>9/10/2025</a:t>
+              <a:t>9/14/25</a:t>
             </a:fld>
             <a:endParaRPr lang="en-US"/>
           </a:p>
@@ -3972,13 +4226,7 @@
       </p:sp>
       <p:sp>
         <p:nvSpPr>
-          <p:cNvPr id="5" name="Footer Placeholder 4">
-            <a:extLst>
-              <a:ext uri="{FF2B5EF4-FFF2-40B4-BE49-F238E27FC236}">
-                <a16:creationId xmlns:a16="http://schemas.microsoft.com/office/drawing/2014/main" id="{04102810-B80E-B65F-59BD-906085680C58}"/>
-              </a:ext>
-            </a:extLst>
-          </p:cNvPr>
+          <p:cNvPr id="5" name="Footer Placeholder 4"/>
           <p:cNvSpPr>
             <a:spLocks noGrp="1"/>
           </p:cNvSpPr>
@@ -3988,8 +4236,8 @@
         </p:nvSpPr>
         <p:spPr>
           <a:xfrm>
-            <a:off x="4038600" y="6356350"/>
-            <a:ext cx="4114800" cy="365125"/>
+            <a:off x="4165600" y="6356351"/>
+            <a:ext cx="3860800" cy="365125"/>
           </a:xfrm>
           <a:prstGeom prst="rect">
             <a:avLst/>
@@ -4015,13 +4263,7 @@
       </p:sp>
       <p:sp>
         <p:nvSpPr>
-          <p:cNvPr id="6" name="Slide Number Placeholder 5">
-            <a:extLst>
-              <a:ext uri="{FF2B5EF4-FFF2-40B4-BE49-F238E27FC236}">
-                <a16:creationId xmlns:a16="http://schemas.microsoft.com/office/drawing/2014/main" id="{C40CF3B9-CD30-6DC0-4F74-CFDEDF94F114}"/>
-              </a:ext>
-            </a:extLst>
-          </p:cNvPr>
+          <p:cNvPr id="6" name="Slide Number Placeholder 5"/>
           <p:cNvSpPr>
             <a:spLocks noGrp="1"/>
           </p:cNvSpPr>
@@ -4031,8 +4273,8 @@
         </p:nvSpPr>
         <p:spPr>
           <a:xfrm>
-            <a:off x="8610600" y="6356350"/>
-            <a:ext cx="2743200" cy="365125"/>
+            <a:off x="8737600" y="6356351"/>
+            <a:ext cx="2844800" cy="365125"/>
           </a:xfrm>
           <a:prstGeom prst="rect">
             <a:avLst/>
@@ -4064,30 +4306,28 @@
     </p:spTree>
     <p:extLst>
       <p:ext uri="{BB962C8B-B14F-4D97-AF65-F5344CB8AC3E}">
-        <p14:creationId xmlns:p14="http://schemas.microsoft.com/office/powerpoint/2010/main" val="340607326"/>
+        <p14:creationId xmlns:p14="http://schemas.microsoft.com/office/powerpoint/2010/main" val="1214051251"/>
       </p:ext>
     </p:extLst>
   </p:cSld>
   <p:clrMap bg1="lt1" tx1="dk1" bg2="lt2" tx2="dk2" accent1="accent1" accent2="accent2" accent3="accent3" accent4="accent4" accent5="accent5" accent6="accent6" hlink="hlink" folHlink="folHlink"/>
   <p:sldLayoutIdLst>
-    <p:sldLayoutId id="2147483661" r:id="rId1"/>
-    <p:sldLayoutId id="2147483662" r:id="rId2"/>
-    <p:sldLayoutId id="2147483663" r:id="rId3"/>
-    <p:sldLayoutId id="2147483664" r:id="rId4"/>
-    <p:sldLayoutId id="2147483665" r:id="rId5"/>
-    <p:sldLayoutId id="2147483666" r:id="rId6"/>
-    <p:sldLayoutId id="2147483667" r:id="rId7"/>
-    <p:sldLayoutId id="2147483668" r:id="rId8"/>
-    <p:sldLayoutId id="2147483669" r:id="rId9"/>
-    <p:sldLayoutId id="2147483670" r:id="rId10"/>
-    <p:sldLayoutId id="2147483671" r:id="rId11"/>
+    <p:sldLayoutId id="2147483673" r:id="rId1"/>
+    <p:sldLayoutId id="2147483674" r:id="rId2"/>
+    <p:sldLayoutId id="2147483675" r:id="rId3"/>
+    <p:sldLayoutId id="2147483676" r:id="rId4"/>
+    <p:sldLayoutId id="2147483677" r:id="rId5"/>
+    <p:sldLayoutId id="2147483678" r:id="rId6"/>
+    <p:sldLayoutId id="2147483679" r:id="rId7"/>
+    <p:sldLayoutId id="2147483680" r:id="rId8"/>
+    <p:sldLayoutId id="2147483681" r:id="rId9"/>
+    <p:sldLayoutId id="2147483682" r:id="rId10"/>
+    <p:sldLayoutId id="2147483683" r:id="rId11"/>
+    <p:sldLayoutId id="2147483684" r:id="rId12"/>
   </p:sldLayoutIdLst>
   <p:txStyles>
     <p:titleStyle>
-      <a:lvl1pPr algn="l" defTabSz="914400" rtl="0" eaLnBrk="1" latinLnBrk="0" hangingPunct="1">
-        <a:lnSpc>
-          <a:spcPct val="90000"/>
-        </a:lnSpc>
+      <a:lvl1pPr algn="ctr" defTabSz="914400" rtl="0" eaLnBrk="1" latinLnBrk="0" hangingPunct="1">
         <a:spcBef>
           <a:spcPct val="0"/>
         </a:spcBef>
@@ -4103,15 +4343,27 @@
       </a:lvl1pPr>
     </p:titleStyle>
     <p:bodyStyle>
-      <a:lvl1pPr marL="228600" indent="-228600" algn="l" defTabSz="914400" rtl="0" eaLnBrk="1" latinLnBrk="0" hangingPunct="1">
-        <a:lnSpc>
-          <a:spcPct val="90000"/>
-        </a:lnSpc>
+      <a:lvl1pPr marL="342900" indent="-342900" algn="l" defTabSz="914400" rtl="0" eaLnBrk="1" latinLnBrk="0" hangingPunct="1">
         <a:spcBef>
-          <a:spcPts val="1000"/>
+          <a:spcPct val="20000"/>
         </a:spcBef>
-        <a:buFont typeface="Arial" panose="020B0604020202020204" pitchFamily="34" charset="0"/>
+        <a:buFont typeface="Arial" pitchFamily="34" charset="0"/>
         <a:buChar char="•"/>
+        <a:defRPr sz="3200" kern="1200">
+          <a:solidFill>
+            <a:schemeClr val="tx1"/>
+          </a:solidFill>
+          <a:latin typeface="+mn-lt"/>
+          <a:ea typeface="+mn-ea"/>
+          <a:cs typeface="+mn-cs"/>
+        </a:defRPr>
+      </a:lvl1pPr>
+      <a:lvl2pPr marL="742950" indent="-285750" algn="l" defTabSz="914400" rtl="0" eaLnBrk="1" latinLnBrk="0" hangingPunct="1">
+        <a:spcBef>
+          <a:spcPct val="20000"/>
+        </a:spcBef>
+        <a:buFont typeface="Arial" pitchFamily="34" charset="0"/>
+        <a:buChar char="–"/>
         <a:defRPr sz="2800" kern="1200">
           <a:solidFill>
             <a:schemeClr val="tx1"/>
@@ -4120,15 +4372,12 @@
           <a:ea typeface="+mn-ea"/>
           <a:cs typeface="+mn-cs"/>
         </a:defRPr>
-      </a:lvl1pPr>
-      <a:lvl2pPr marL="685800" indent="-228600" algn="l" defTabSz="914400" rtl="0" eaLnBrk="1" latinLnBrk="0" hangingPunct="1">
-        <a:lnSpc>
-          <a:spcPct val="90000"/>
-        </a:lnSpc>
+      </a:lvl2pPr>
+      <a:lvl3pPr marL="1143000" indent="-228600" algn="l" defTabSz="914400" rtl="0" eaLnBrk="1" latinLnBrk="0" hangingPunct="1">
         <a:spcBef>
-          <a:spcPts val="500"/>
+          <a:spcPct val="20000"/>
         </a:spcBef>
-        <a:buFont typeface="Arial" panose="020B0604020202020204" pitchFamily="34" charset="0"/>
+        <a:buFont typeface="Arial" pitchFamily="34" charset="0"/>
         <a:buChar char="•"/>
         <a:defRPr sz="2400" kern="1200">
           <a:solidFill>
@@ -4138,15 +4387,42 @@
           <a:ea typeface="+mn-ea"/>
           <a:cs typeface="+mn-cs"/>
         </a:defRPr>
-      </a:lvl2pPr>
-      <a:lvl3pPr marL="1143000" indent="-228600" algn="l" defTabSz="914400" rtl="0" eaLnBrk="1" latinLnBrk="0" hangingPunct="1">
-        <a:lnSpc>
-          <a:spcPct val="90000"/>
-        </a:lnSpc>
+      </a:lvl3pPr>
+      <a:lvl4pPr marL="1600200" indent="-228600" algn="l" defTabSz="914400" rtl="0" eaLnBrk="1" latinLnBrk="0" hangingPunct="1">
         <a:spcBef>
-          <a:spcPts val="500"/>
+          <a:spcPct val="20000"/>
         </a:spcBef>
-        <a:buFont typeface="Arial" panose="020B0604020202020204" pitchFamily="34" charset="0"/>
+        <a:buFont typeface="Arial" pitchFamily="34" charset="0"/>
+        <a:buChar char="–"/>
+        <a:defRPr sz="2000" kern="1200">
+          <a:solidFill>
+            <a:schemeClr val="tx1"/>
+          </a:solidFill>
+          <a:latin typeface="+mn-lt"/>
+          <a:ea typeface="+mn-ea"/>
+          <a:cs typeface="+mn-cs"/>
+        </a:defRPr>
+      </a:lvl4pPr>
+      <a:lvl5pPr marL="2057400" indent="-228600" algn="l" defTabSz="914400" rtl="0" eaLnBrk="1" latinLnBrk="0" hangingPunct="1">
+        <a:spcBef>
+          <a:spcPct val="20000"/>
+        </a:spcBef>
+        <a:buFont typeface="Arial" pitchFamily="34" charset="0"/>
+        <a:buChar char="»"/>
+        <a:defRPr sz="2000" kern="1200">
+          <a:solidFill>
+            <a:schemeClr val="tx1"/>
+          </a:solidFill>
+          <a:latin typeface="+mn-lt"/>
+          <a:ea typeface="+mn-ea"/>
+          <a:cs typeface="+mn-cs"/>
+        </a:defRPr>
+      </a:lvl5pPr>
+      <a:lvl6pPr marL="2514600" indent="-228600" algn="l" defTabSz="914400" rtl="0" eaLnBrk="1" latinLnBrk="0" hangingPunct="1">
+        <a:spcBef>
+          <a:spcPct val="20000"/>
+        </a:spcBef>
+        <a:buFont typeface="Arial" pitchFamily="34" charset="0"/>
         <a:buChar char="•"/>
         <a:defRPr sz="2000" kern="1200">
           <a:solidFill>
@@ -4156,71 +4432,14 @@
           <a:ea typeface="+mn-ea"/>
           <a:cs typeface="+mn-cs"/>
         </a:defRPr>
-      </a:lvl3pPr>
-      <a:lvl4pPr marL="1600200" indent="-228600" algn="l" defTabSz="914400" rtl="0" eaLnBrk="1" latinLnBrk="0" hangingPunct="1">
-        <a:lnSpc>
-          <a:spcPct val="90000"/>
-        </a:lnSpc>
-        <a:spcBef>
-          <a:spcPts val="500"/>
-        </a:spcBef>
-        <a:buFont typeface="Arial" panose="020B0604020202020204" pitchFamily="34" charset="0"/>
-        <a:buChar char="•"/>
-        <a:defRPr sz="1800" kern="1200">
-          <a:solidFill>
-            <a:schemeClr val="tx1"/>
-          </a:solidFill>
-          <a:latin typeface="+mn-lt"/>
-          <a:ea typeface="+mn-ea"/>
-          <a:cs typeface="+mn-cs"/>
-        </a:defRPr>
-      </a:lvl4pPr>
-      <a:lvl5pPr marL="2057400" indent="-228600" algn="l" defTabSz="914400" rtl="0" eaLnBrk="1" latinLnBrk="0" hangingPunct="1">
-        <a:lnSpc>
-          <a:spcPct val="90000"/>
-        </a:lnSpc>
-        <a:spcBef>
-          <a:spcPts val="500"/>
-        </a:spcBef>
-        <a:buFont typeface="Arial" panose="020B0604020202020204" pitchFamily="34" charset="0"/>
-        <a:buChar char="•"/>
-        <a:defRPr sz="1800" kern="1200">
-          <a:solidFill>
-            <a:schemeClr val="tx1"/>
-          </a:solidFill>
-          <a:latin typeface="+mn-lt"/>
-          <a:ea typeface="+mn-ea"/>
-          <a:cs typeface="+mn-cs"/>
-        </a:defRPr>
-      </a:lvl5pPr>
-      <a:lvl6pPr marL="2514600" indent="-228600" algn="l" defTabSz="914400" rtl="0" eaLnBrk="1" latinLnBrk="0" hangingPunct="1">
-        <a:lnSpc>
-          <a:spcPct val="90000"/>
-        </a:lnSpc>
-        <a:spcBef>
-          <a:spcPts val="500"/>
-        </a:spcBef>
-        <a:buFont typeface="Arial" panose="020B0604020202020204" pitchFamily="34" charset="0"/>
-        <a:buChar char="•"/>
-        <a:defRPr sz="1800" kern="1200">
-          <a:solidFill>
-            <a:schemeClr val="tx1"/>
-          </a:solidFill>
-          <a:latin typeface="+mn-lt"/>
-          <a:ea typeface="+mn-ea"/>
-          <a:cs typeface="+mn-cs"/>
-        </a:defRPr>
       </a:lvl6pPr>
       <a:lvl7pPr marL="2971800" indent="-228600" algn="l" defTabSz="914400" rtl="0" eaLnBrk="1" latinLnBrk="0" hangingPunct="1">
-        <a:lnSpc>
-          <a:spcPct val="90000"/>
-        </a:lnSpc>
         <a:spcBef>
-          <a:spcPts val="500"/>
+          <a:spcPct val="20000"/>
         </a:spcBef>
-        <a:buFont typeface="Arial" panose="020B0604020202020204" pitchFamily="34" charset="0"/>
+        <a:buFont typeface="Arial" pitchFamily="34" charset="0"/>
         <a:buChar char="•"/>
-        <a:defRPr sz="1800" kern="1200">
+        <a:defRPr sz="2000" kern="1200">
           <a:solidFill>
             <a:schemeClr val="tx1"/>
           </a:solidFill>
@@ -4230,15 +4449,12 @@
         </a:defRPr>
       </a:lvl7pPr>
       <a:lvl8pPr marL="3429000" indent="-228600" algn="l" defTabSz="914400" rtl="0" eaLnBrk="1" latinLnBrk="0" hangingPunct="1">
-        <a:lnSpc>
-          <a:spcPct val="90000"/>
-        </a:lnSpc>
         <a:spcBef>
-          <a:spcPts val="500"/>
+          <a:spcPct val="20000"/>
         </a:spcBef>
-        <a:buFont typeface="Arial" panose="020B0604020202020204" pitchFamily="34" charset="0"/>
+        <a:buFont typeface="Arial" pitchFamily="34" charset="0"/>
         <a:buChar char="•"/>
-        <a:defRPr sz="1800" kern="1200">
+        <a:defRPr sz="2000" kern="1200">
           <a:solidFill>
             <a:schemeClr val="tx1"/>
           </a:solidFill>
@@ -4248,15 +4464,12 @@
         </a:defRPr>
       </a:lvl8pPr>
       <a:lvl9pPr marL="3886200" indent="-228600" algn="l" defTabSz="914400" rtl="0" eaLnBrk="1" latinLnBrk="0" hangingPunct="1">
-        <a:lnSpc>
-          <a:spcPct val="90000"/>
-        </a:lnSpc>
         <a:spcBef>
-          <a:spcPts val="500"/>
+          <a:spcPct val="20000"/>
         </a:spcBef>
-        <a:buFont typeface="Arial" panose="020B0604020202020204" pitchFamily="34" charset="0"/>
+        <a:buFont typeface="Arial" pitchFamily="34" charset="0"/>
         <a:buChar char="•"/>
-        <a:defRPr sz="1800" kern="1200">
+        <a:defRPr sz="2000" kern="1200">
           <a:solidFill>
             <a:schemeClr val="tx1"/>
           </a:solidFill>
@@ -6446,8 +6659,8 @@
         </p:blipFill>
         <p:spPr>
           <a:xfrm>
-            <a:off x="6362365" y="2781924"/>
-            <a:ext cx="4801270" cy="2438740"/>
+            <a:off x="6489700" y="2643981"/>
+            <a:ext cx="4800600" cy="2438400"/>
           </a:xfrm>
           <a:prstGeom prst="rect">
             <a:avLst/>
@@ -7121,6 +7334,60 @@
           </a:p>
         </p:txBody>
       </p:sp>
+      <p:sp>
+        <p:nvSpPr>
+          <p:cNvPr id="3" name="Content Placeholder 2">
+            <a:extLst>
+              <a:ext uri="{FF2B5EF4-FFF2-40B4-BE49-F238E27FC236}">
+                <a16:creationId xmlns:a16="http://schemas.microsoft.com/office/drawing/2014/main" id="{A98917F7-CAEB-FC72-1B7D-721CBC62E27B}"/>
+              </a:ext>
+            </a:extLst>
+          </p:cNvPr>
+          <p:cNvSpPr>
+            <a:spLocks noGrp="1"/>
+          </p:cNvSpPr>
+          <p:nvPr>
+            <p:ph idx="1"/>
+          </p:nvPr>
+        </p:nvSpPr>
+        <p:spPr>
+          <a:xfrm>
+            <a:off x="457199" y="1690689"/>
+            <a:ext cx="6281615" cy="4802186"/>
+          </a:xfrm>
+        </p:spPr>
+        <p:txBody>
+          <a:bodyPr>
+            <a:normAutofit/>
+          </a:bodyPr>
+          <a:lstStyle/>
+          <a:p>
+            <a:pPr marL="0" indent="0" algn="ctr">
+              <a:buNone/>
+            </a:pPr>
+            <a:endParaRPr lang="en-IE" dirty="0"/>
+          </a:p>
+          <a:p>
+            <a:r>
+              <a:rPr lang="en-US" dirty="0"/>
+              <a:t>Object-oriented programming is based on the concept of objects. </a:t>
+            </a:r>
+          </a:p>
+          <a:p>
+            <a:r>
+              <a:rPr lang="en-US" dirty="0"/>
+              <a:t>In object-oriented programming data structures, or objects are defined, each with its own properties or attributes.</a:t>
+            </a:r>
+          </a:p>
+          <a:p>
+            <a:r>
+              <a:rPr lang="en-US" dirty="0"/>
+              <a:t>Each object can also contain its own procedures or methods</a:t>
+            </a:r>
+            <a:endParaRPr lang="en-IE" dirty="0"/>
+          </a:p>
+        </p:txBody>
+      </p:sp>
       <p:pic>
         <p:nvPicPr>
           <p:cNvPr id="2050" name="Picture 2">
@@ -7168,60 +7435,6 @@
           </a:extLst>
         </p:spPr>
       </p:pic>
-      <p:sp>
-        <p:nvSpPr>
-          <p:cNvPr id="3" name="Content Placeholder 2">
-            <a:extLst>
-              <a:ext uri="{FF2B5EF4-FFF2-40B4-BE49-F238E27FC236}">
-                <a16:creationId xmlns:a16="http://schemas.microsoft.com/office/drawing/2014/main" id="{A98917F7-CAEB-FC72-1B7D-721CBC62E27B}"/>
-              </a:ext>
-            </a:extLst>
-          </p:cNvPr>
-          <p:cNvSpPr>
-            <a:spLocks noGrp="1"/>
-          </p:cNvSpPr>
-          <p:nvPr>
-            <p:ph idx="1"/>
-          </p:nvPr>
-        </p:nvSpPr>
-        <p:spPr>
-          <a:xfrm>
-            <a:off x="457199" y="1690689"/>
-            <a:ext cx="6281615" cy="4802186"/>
-          </a:xfrm>
-        </p:spPr>
-        <p:txBody>
-          <a:bodyPr>
-            <a:normAutofit/>
-          </a:bodyPr>
-          <a:lstStyle/>
-          <a:p>
-            <a:pPr marL="0" indent="0" algn="ctr">
-              <a:buNone/>
-            </a:pPr>
-            <a:endParaRPr lang="en-IE" dirty="0"/>
-          </a:p>
-          <a:p>
-            <a:r>
-              <a:rPr lang="en-US" dirty="0"/>
-              <a:t>Object-oriented programming is based on the concept of objects. </a:t>
-            </a:r>
-          </a:p>
-          <a:p>
-            <a:r>
-              <a:rPr lang="en-US" dirty="0"/>
-              <a:t>In object-oriented programming data structures, or objects are defined, each with its own properties or attributes.</a:t>
-            </a:r>
-          </a:p>
-          <a:p>
-            <a:r>
-              <a:rPr lang="en-US" dirty="0"/>
-              <a:t>Each object can also contain its own procedures or methods</a:t>
-            </a:r>
-            <a:endParaRPr lang="en-IE" dirty="0"/>
-          </a:p>
-        </p:txBody>
-      </p:sp>
     </p:spTree>
     <p:extLst>
       <p:ext uri="{BB962C8B-B14F-4D97-AF65-F5344CB8AC3E}">
@@ -7357,7 +7570,7 @@
         </p:spPr>
         <p:txBody>
           <a:bodyPr>
-            <a:normAutofit/>
+            <a:normAutofit fontScale="85000" lnSpcReduction="10000"/>
           </a:bodyPr>
           <a:lstStyle/>
           <a:p>
@@ -8104,7 +8317,7 @@
 </file>
 
 <file path=ppt/theme/theme1.xml><?xml version="1.0" encoding="utf-8"?>
-<a:theme xmlns:a="http://schemas.openxmlformats.org/drawingml/2006/main" name="Office Theme">
+<a:theme xmlns:a="http://schemas.openxmlformats.org/drawingml/2006/main" name="a-processing-mouse-event-methods">
   <a:themeElements>
     <a:clrScheme name="Office">
       <a:dk1>
@@ -8114,44 +8327,44 @@
         <a:sysClr val="window" lastClr="FFFFFF"/>
       </a:lt1>
       <a:dk2>
-        <a:srgbClr val="44546A"/>
+        <a:srgbClr val="1F497D"/>
       </a:dk2>
       <a:lt2>
-        <a:srgbClr val="E7E6E6"/>
+        <a:srgbClr val="EEECE1"/>
       </a:lt2>
       <a:accent1>
-        <a:srgbClr val="4472C4"/>
+        <a:srgbClr val="4F81BD"/>
       </a:accent1>
       <a:accent2>
-        <a:srgbClr val="ED7D31"/>
+        <a:srgbClr val="C0504D"/>
       </a:accent2>
       <a:accent3>
-        <a:srgbClr val="A5A5A5"/>
+        <a:srgbClr val="9BBB59"/>
       </a:accent3>
       <a:accent4>
-        <a:srgbClr val="FFC000"/>
+        <a:srgbClr val="8064A2"/>
       </a:accent4>
       <a:accent5>
-        <a:srgbClr val="5B9BD5"/>
+        <a:srgbClr val="4BACC6"/>
       </a:accent5>
       <a:accent6>
-        <a:srgbClr val="70AD47"/>
+        <a:srgbClr val="F79646"/>
       </a:accent6>
       <a:hlink>
-        <a:srgbClr val="0563C1"/>
+        <a:srgbClr val="0000FF"/>
       </a:hlink>
       <a:folHlink>
-        <a:srgbClr val="954F72"/>
+        <a:srgbClr val="800080"/>
       </a:folHlink>
     </a:clrScheme>
     <a:fontScheme name="Office">
       <a:majorFont>
-        <a:latin typeface="Calibri Light" panose="020F0302020204030204"/>
+        <a:latin typeface="Calibri"/>
         <a:ea typeface=""/>
         <a:cs typeface=""/>
-        <a:font script="Jpan" typeface="游ゴシック Light"/>
+        <a:font script="Jpan" typeface="ＭＳ Ｐゴシック"/>
         <a:font script="Hang" typeface="맑은 고딕"/>
-        <a:font script="Hans" typeface="等线 Light"/>
+        <a:font script="Hans" typeface="宋体"/>
         <a:font script="Hant" typeface="新細明體"/>
         <a:font script="Arab" typeface="Times New Roman"/>
         <a:font script="Hebr" typeface="Times New Roman"/>
@@ -8178,32 +8391,14 @@
         <a:font script="Mong" typeface="Mongolian Baiti"/>
         <a:font script="Viet" typeface="Times New Roman"/>
         <a:font script="Uigh" typeface="Microsoft Uighur"/>
-        <a:font script="Geor" typeface="Sylfaen"/>
-        <a:font script="Armn" typeface="Arial"/>
-        <a:font script="Bugi" typeface="Leelawadee UI"/>
-        <a:font script="Bopo" typeface="Microsoft JhengHei"/>
-        <a:font script="Java" typeface="Javanese Text"/>
-        <a:font script="Lisu" typeface="Segoe UI"/>
-        <a:font script="Mymr" typeface="Myanmar Text"/>
-        <a:font script="Nkoo" typeface="Ebrima"/>
-        <a:font script="Olck" typeface="Nirmala UI"/>
-        <a:font script="Osma" typeface="Ebrima"/>
-        <a:font script="Phag" typeface="Phagspa"/>
-        <a:font script="Syrn" typeface="Estrangelo Edessa"/>
-        <a:font script="Syrj" typeface="Estrangelo Edessa"/>
-        <a:font script="Syre" typeface="Estrangelo Edessa"/>
-        <a:font script="Sora" typeface="Nirmala UI"/>
-        <a:font script="Tale" typeface="Microsoft Tai Le"/>
-        <a:font script="Talu" typeface="Microsoft New Tai Lue"/>
-        <a:font script="Tfng" typeface="Ebrima"/>
       </a:majorFont>
       <a:minorFont>
-        <a:latin typeface="Calibri" panose="020F0502020204030204"/>
+        <a:latin typeface="Calibri"/>
         <a:ea typeface=""/>
         <a:cs typeface=""/>
-        <a:font script="Jpan" typeface="游ゴシック"/>
+        <a:font script="Jpan" typeface="ＭＳ Ｐゴシック"/>
         <a:font script="Hang" typeface="맑은 고딕"/>
-        <a:font script="Hans" typeface="等线"/>
+        <a:font script="Hans" typeface="宋体"/>
         <a:font script="Hant" typeface="新細明體"/>
         <a:font script="Arab" typeface="Arial"/>
         <a:font script="Hebr" typeface="Arial"/>
@@ -8230,24 +8425,6 @@
         <a:font script="Mong" typeface="Mongolian Baiti"/>
         <a:font script="Viet" typeface="Arial"/>
         <a:font script="Uigh" typeface="Microsoft Uighur"/>
-        <a:font script="Geor" typeface="Sylfaen"/>
-        <a:font script="Armn" typeface="Arial"/>
-        <a:font script="Bugi" typeface="Leelawadee UI"/>
-        <a:font script="Bopo" typeface="Microsoft JhengHei"/>
-        <a:font script="Java" typeface="Javanese Text"/>
-        <a:font script="Lisu" typeface="Segoe UI"/>
-        <a:font script="Mymr" typeface="Myanmar Text"/>
-        <a:font script="Nkoo" typeface="Ebrima"/>
-        <a:font script="Olck" typeface="Nirmala UI"/>
-        <a:font script="Osma" typeface="Ebrima"/>
-        <a:font script="Phag" typeface="Phagspa"/>
-        <a:font script="Syrn" typeface="Estrangelo Edessa"/>
-        <a:font script="Syrj" typeface="Estrangelo Edessa"/>
-        <a:font script="Syre" typeface="Estrangelo Edessa"/>
-        <a:font script="Sora" typeface="Nirmala UI"/>
-        <a:font script="Tale" typeface="Microsoft Tai Le"/>
-        <a:font script="Talu" typeface="Microsoft New Tai Lue"/>
-        <a:font script="Tfng" typeface="Ebrima"/>
       </a:minorFont>
     </a:fontScheme>
     <a:fmtScheme name="Office">
@@ -8259,142 +8436,166 @@
           <a:gsLst>
             <a:gs pos="0">
               <a:schemeClr val="phClr">
-                <a:lumMod val="110000"/>
-                <a:satMod val="105000"/>
-                <a:tint val="67000"/>
+                <a:tint val="50000"/>
+                <a:satMod val="300000"/>
               </a:schemeClr>
             </a:gs>
-            <a:gs pos="50000">
+            <a:gs pos="35000">
               <a:schemeClr val="phClr">
-                <a:lumMod val="105000"/>
-                <a:satMod val="103000"/>
-                <a:tint val="73000"/>
+                <a:tint val="37000"/>
+                <a:satMod val="300000"/>
               </a:schemeClr>
             </a:gs>
             <a:gs pos="100000">
               <a:schemeClr val="phClr">
-                <a:lumMod val="105000"/>
-                <a:satMod val="109000"/>
-                <a:tint val="81000"/>
+                <a:tint val="15000"/>
+                <a:satMod val="350000"/>
               </a:schemeClr>
             </a:gs>
           </a:gsLst>
-          <a:lin ang="5400000" scaled="0"/>
+          <a:lin ang="16200000" scaled="1"/>
         </a:gradFill>
         <a:gradFill rotWithShape="1">
           <a:gsLst>
             <a:gs pos="0">
               <a:schemeClr val="phClr">
-                <a:satMod val="103000"/>
-                <a:lumMod val="102000"/>
-                <a:tint val="94000"/>
+                <a:shade val="51000"/>
+                <a:satMod val="130000"/>
               </a:schemeClr>
             </a:gs>
-            <a:gs pos="50000">
+            <a:gs pos="80000">
               <a:schemeClr val="phClr">
-                <a:satMod val="110000"/>
-                <a:lumMod val="100000"/>
-                <a:shade val="100000"/>
+                <a:shade val="93000"/>
+                <a:satMod val="130000"/>
               </a:schemeClr>
             </a:gs>
             <a:gs pos="100000">
               <a:schemeClr val="phClr">
-                <a:lumMod val="99000"/>
-                <a:satMod val="120000"/>
-                <a:shade val="78000"/>
+                <a:shade val="94000"/>
+                <a:satMod val="135000"/>
               </a:schemeClr>
             </a:gs>
           </a:gsLst>
-          <a:lin ang="5400000" scaled="0"/>
+          <a:lin ang="16200000" scaled="0"/>
         </a:gradFill>
       </a:fillStyleLst>
       <a:lnStyleLst>
-        <a:ln w="6350" cap="flat" cmpd="sng" algn="ctr">
+        <a:ln w="9525" cap="flat" cmpd="sng" algn="ctr">
+          <a:solidFill>
+            <a:schemeClr val="phClr">
+              <a:shade val="95000"/>
+              <a:satMod val="105000"/>
+            </a:schemeClr>
+          </a:solidFill>
+          <a:prstDash val="solid"/>
+        </a:ln>
+        <a:ln w="25400" cap="flat" cmpd="sng" algn="ctr">
           <a:solidFill>
             <a:schemeClr val="phClr"/>
           </a:solidFill>
           <a:prstDash val="solid"/>
-          <a:miter lim="800000"/>
         </a:ln>
-        <a:ln w="12700" cap="flat" cmpd="sng" algn="ctr">
+        <a:ln w="38100" cap="flat" cmpd="sng" algn="ctr">
           <a:solidFill>
             <a:schemeClr val="phClr"/>
           </a:solidFill>
           <a:prstDash val="solid"/>
-          <a:miter lim="800000"/>
-        </a:ln>
-        <a:ln w="19050" cap="flat" cmpd="sng" algn="ctr">
-          <a:solidFill>
-            <a:schemeClr val="phClr"/>
-          </a:solidFill>
-          <a:prstDash val="solid"/>
-          <a:miter lim="800000"/>
         </a:ln>
       </a:lnStyleLst>
       <a:effectStyleLst>
         <a:effectStyle>
-          <a:effectLst/>
-        </a:effectStyle>
-        <a:effectStyle>
-          <a:effectLst/>
+          <a:effectLst>
+            <a:outerShdw blurRad="40000" dist="20000" dir="5400000" rotWithShape="0">
+              <a:srgbClr val="000000">
+                <a:alpha val="38000"/>
+              </a:srgbClr>
+            </a:outerShdw>
+          </a:effectLst>
         </a:effectStyle>
         <a:effectStyle>
           <a:effectLst>
-            <a:outerShdw blurRad="57150" dist="19050" dir="5400000" algn="ctr" rotWithShape="0">
+            <a:outerShdw blurRad="40000" dist="23000" dir="5400000" rotWithShape="0">
               <a:srgbClr val="000000">
-                <a:alpha val="63000"/>
+                <a:alpha val="35000"/>
               </a:srgbClr>
             </a:outerShdw>
           </a:effectLst>
+        </a:effectStyle>
+        <a:effectStyle>
+          <a:effectLst>
+            <a:outerShdw blurRad="40000" dist="23000" dir="5400000" rotWithShape="0">
+              <a:srgbClr val="000000">
+                <a:alpha val="35000"/>
+              </a:srgbClr>
+            </a:outerShdw>
+          </a:effectLst>
+          <a:scene3d>
+            <a:camera prst="orthographicFront">
+              <a:rot lat="0" lon="0" rev="0"/>
+            </a:camera>
+            <a:lightRig rig="threePt" dir="t">
+              <a:rot lat="0" lon="0" rev="1200000"/>
+            </a:lightRig>
+          </a:scene3d>
+          <a:sp3d>
+            <a:bevelT w="63500" h="25400"/>
+          </a:sp3d>
         </a:effectStyle>
       </a:effectStyleLst>
       <a:bgFillStyleLst>
         <a:solidFill>
           <a:schemeClr val="phClr"/>
         </a:solidFill>
-        <a:solidFill>
-          <a:schemeClr val="phClr">
-            <a:tint val="95000"/>
-            <a:satMod val="170000"/>
-          </a:schemeClr>
-        </a:solidFill>
         <a:gradFill rotWithShape="1">
           <a:gsLst>
             <a:gs pos="0">
               <a:schemeClr val="phClr">
-                <a:tint val="93000"/>
-                <a:satMod val="150000"/>
-                <a:shade val="98000"/>
-                <a:lumMod val="102000"/>
+                <a:tint val="40000"/>
+                <a:satMod val="350000"/>
               </a:schemeClr>
             </a:gs>
-            <a:gs pos="50000">
+            <a:gs pos="40000">
               <a:schemeClr val="phClr">
-                <a:tint val="98000"/>
-                <a:satMod val="130000"/>
-                <a:shade val="90000"/>
-                <a:lumMod val="103000"/>
+                <a:tint val="45000"/>
+                <a:shade val="99000"/>
+                <a:satMod val="350000"/>
               </a:schemeClr>
             </a:gs>
             <a:gs pos="100000">
               <a:schemeClr val="phClr">
-                <a:shade val="63000"/>
-                <a:satMod val="120000"/>
+                <a:shade val="20000"/>
+                <a:satMod val="255000"/>
               </a:schemeClr>
             </a:gs>
           </a:gsLst>
-          <a:lin ang="5400000" scaled="0"/>
+          <a:path path="circle">
+            <a:fillToRect l="50000" t="-80000" r="50000" b="180000"/>
+          </a:path>
+        </a:gradFill>
+        <a:gradFill rotWithShape="1">
+          <a:gsLst>
+            <a:gs pos="0">
+              <a:schemeClr val="phClr">
+                <a:tint val="80000"/>
+                <a:satMod val="300000"/>
+              </a:schemeClr>
+            </a:gs>
+            <a:gs pos="100000">
+              <a:schemeClr val="phClr">
+                <a:shade val="30000"/>
+                <a:satMod val="200000"/>
+              </a:schemeClr>
+            </a:gs>
+          </a:gsLst>
+          <a:path path="circle">
+            <a:fillToRect l="50000" t="50000" r="50000" b="50000"/>
+          </a:path>
         </a:gradFill>
       </a:bgFillStyleLst>
     </a:fmtScheme>
   </a:themeElements>
   <a:objectDefaults/>
   <a:extraClrSchemeLst/>
-  <a:extLst>
-    <a:ext uri="{05A4C25C-085E-4340-85A3-A5531E510DB2}">
-      <thm15:themeFamily xmlns:thm15="http://schemas.microsoft.com/office/thememl/2012/main" name="Office Theme" id="{62F939B6-93AF-4DB8-9C6B-D6C7DFDC589F}" vid="{4A3C46E8-61CC-4603-A589-7422A47A8E4A}"/>
-    </a:ext>
-  </a:extLst>
 </a:theme>
 </file>
 

--- a/topic01-objects-and-classes/unit-1/talk-1-bluej/getting-started-bluej.pptx
+++ b/topic01-objects-and-classes/unit-1/talk-1-bluej/getting-started-bluej.pptx
@@ -6721,9 +6721,15 @@
       </p:sp>
       <p:pic>
         <p:nvPicPr>
-          <p:cNvPr id="3074" name="Picture 2" descr="Image result for questions"/>
+          <p:cNvPr id="4" name="Picture 3" descr="A green question mark in a circle&#10;&#10;AI-generated content may be incorrect.">
+            <a:extLst>
+              <a:ext uri="{FF2B5EF4-FFF2-40B4-BE49-F238E27FC236}">
+                <a16:creationId xmlns:a16="http://schemas.microsoft.com/office/drawing/2014/main" id="{CEE65562-5B42-3D67-0325-51491B4843F1}"/>
+              </a:ext>
+            </a:extLst>
+          </p:cNvPr>
           <p:cNvPicPr>
-            <a:picLocks noChangeAspect="1" noChangeArrowheads="1"/>
+            <a:picLocks noChangeAspect="1"/>
           </p:cNvPicPr>
           <p:nvPr/>
         </p:nvPicPr>
@@ -6735,29 +6741,18 @@
               </a:ext>
             </a:extLst>
           </a:blip>
-          <a:srcRect/>
           <a:stretch>
             <a:fillRect/>
           </a:stretch>
         </p:blipFill>
-        <p:spPr bwMode="auto">
+        <p:spPr>
           <a:xfrm>
-            <a:off x="3810000" y="2057401"/>
-            <a:ext cx="4343400" cy="3509469"/>
+            <a:off x="2971800" y="1325562"/>
+            <a:ext cx="5257800" cy="5257800"/>
           </a:xfrm>
           <a:prstGeom prst="rect">
             <a:avLst/>
           </a:prstGeom>
-          <a:noFill/>
-          <a:extLst>
-            <a:ext uri="{909E8E84-426E-40DD-AFC4-6F175D3DCCD1}">
-              <a14:hiddenFill xmlns:a14="http://schemas.microsoft.com/office/drawing/2010/main">
-                <a:solidFill>
-                  <a:srgbClr val="FFFFFF"/>
-                </a:solidFill>
-              </a14:hiddenFill>
-            </a:ext>
-          </a:extLst>
         </p:spPr>
       </p:pic>
     </p:spTree>

--- a/topic01-objects-and-classes/unit-1/talk-1-bluej/getting-started-bluej.pptx
+++ b/topic01-objects-and-classes/unit-1/talk-1-bluej/getting-started-bluej.pptx
@@ -225,7 +225,7 @@
           <a:p>
             <a:fld id="{58C3D141-1E1C-433C-AD3A-CD56CBBB4F9F}" type="datetimeFigureOut">
               <a:rPr lang="en-IE" smtClean="0"/>
-              <a:t>14/09/2025</a:t>
+              <a:t>15/09/2025</a:t>
             </a:fld>
             <a:endParaRPr lang="en-IE"/>
           </a:p>
@@ -1138,7 +1138,7 @@
             <a:fld id="{1D8BD707-D9CF-40AE-B4C6-C98DA3205C09}" type="datetimeFigureOut">
               <a:rPr lang="en-US" smtClean="0"/>
               <a:pPr/>
-              <a:t>9/14/25</a:t>
+              <a:t>9/15/25</a:t>
             </a:fld>
             <a:endParaRPr lang="en-US"/>
           </a:p>
@@ -1310,7 +1310,7 @@
             <a:fld id="{1D8BD707-D9CF-40AE-B4C6-C98DA3205C09}" type="datetimeFigureOut">
               <a:rPr lang="en-US" smtClean="0"/>
               <a:pPr/>
-              <a:t>9/14/25</a:t>
+              <a:t>9/15/25</a:t>
             </a:fld>
             <a:endParaRPr lang="en-US"/>
           </a:p>
@@ -1492,7 +1492,7 @@
             <a:fld id="{1D8BD707-D9CF-40AE-B4C6-C98DA3205C09}" type="datetimeFigureOut">
               <a:rPr lang="en-US" smtClean="0"/>
               <a:pPr/>
-              <a:t>9/14/25</a:t>
+              <a:t>9/15/25</a:t>
             </a:fld>
             <a:endParaRPr lang="en-US"/>
           </a:p>
@@ -1816,7 +1816,7 @@
             <a:fld id="{1D8BD707-D9CF-40AE-B4C6-C98DA3205C09}" type="datetimeFigureOut">
               <a:rPr lang="en-US" smtClean="0"/>
               <a:pPr/>
-              <a:t>9/14/25</a:t>
+              <a:t>9/15/25</a:t>
             </a:fld>
             <a:endParaRPr lang="en-US"/>
           </a:p>
@@ -2190,7 +2190,7 @@
             <a:fld id="{1D8BD707-D9CF-40AE-B4C6-C98DA3205C09}" type="datetimeFigureOut">
               <a:rPr lang="en-US" smtClean="0"/>
               <a:pPr/>
-              <a:t>9/14/25</a:t>
+              <a:t>9/15/25</a:t>
             </a:fld>
             <a:endParaRPr lang="en-US"/>
           </a:p>
@@ -2491,7 +2491,7 @@
             <a:fld id="{1D8BD707-D9CF-40AE-B4C6-C98DA3205C09}" type="datetimeFigureOut">
               <a:rPr lang="en-US" smtClean="0"/>
               <a:pPr/>
-              <a:t>9/14/25</a:t>
+              <a:t>9/15/25</a:t>
             </a:fld>
             <a:endParaRPr lang="en-US"/>
           </a:p>
@@ -3039,7 +3039,7 @@
             <a:fld id="{1D8BD707-D9CF-40AE-B4C6-C98DA3205C09}" type="datetimeFigureOut">
               <a:rPr lang="en-US" smtClean="0"/>
               <a:pPr/>
-              <a:t>9/14/25</a:t>
+              <a:t>9/15/25</a:t>
             </a:fld>
             <a:endParaRPr lang="en-US"/>
           </a:p>
@@ -3246,7 +3246,7 @@
             <a:fld id="{1D8BD707-D9CF-40AE-B4C6-C98DA3205C09}" type="datetimeFigureOut">
               <a:rPr lang="en-US" smtClean="0"/>
               <a:pPr/>
-              <a:t>9/14/25</a:t>
+              <a:t>9/15/25</a:t>
             </a:fld>
             <a:endParaRPr lang="en-US"/>
           </a:p>
@@ -3460,7 +3460,7 @@
             <a:fld id="{1D8BD707-D9CF-40AE-B4C6-C98DA3205C09}" type="datetimeFigureOut">
               <a:rPr lang="en-US" smtClean="0"/>
               <a:pPr/>
-              <a:t>9/14/25</a:t>
+              <a:t>9/15/25</a:t>
             </a:fld>
             <a:endParaRPr lang="en-US"/>
           </a:p>
@@ -3739,7 +3739,7 @@
             <a:fld id="{1D8BD707-D9CF-40AE-B4C6-C98DA3205C09}" type="datetimeFigureOut">
               <a:rPr lang="en-US" smtClean="0"/>
               <a:pPr/>
-              <a:t>9/14/25</a:t>
+              <a:t>9/15/25</a:t>
             </a:fld>
             <a:endParaRPr lang="en-US"/>
           </a:p>
@@ -3998,7 +3998,7 @@
             <a:fld id="{1D8BD707-D9CF-40AE-B4C6-C98DA3205C09}" type="datetimeFigureOut">
               <a:rPr lang="en-US" smtClean="0"/>
               <a:pPr/>
-              <a:t>9/14/25</a:t>
+              <a:t>9/15/25</a:t>
             </a:fld>
             <a:endParaRPr lang="en-US"/>
           </a:p>
@@ -4218,7 +4218,7 @@
             <a:fld id="{1D8BD707-D9CF-40AE-B4C6-C98DA3205C09}" type="datetimeFigureOut">
               <a:rPr lang="en-US" smtClean="0"/>
               <a:pPr/>
-              <a:t>9/14/25</a:t>
+              <a:t>9/15/25</a:t>
             </a:fld>
             <a:endParaRPr lang="en-US"/>
           </a:p>
@@ -7560,12 +7560,12 @@
         <p:spPr>
           <a:xfrm>
             <a:off x="457199" y="1690689"/>
-            <a:ext cx="6281615" cy="4802186"/>
+            <a:ext cx="5181601" cy="4802186"/>
           </a:xfrm>
         </p:spPr>
         <p:txBody>
           <a:bodyPr>
-            <a:normAutofit fontScale="85000" lnSpcReduction="10000"/>
+            <a:normAutofit fontScale="77500" lnSpcReduction="20000"/>
           </a:bodyPr>
           <a:lstStyle/>
           <a:p>
